--- a/Module 1/Performance evaluation.pptx
+++ b/Module 1/Performance evaluation.pptx
@@ -23,7 +23,7 @@
     <p:sldId id="272" r:id="rId17"/>
     <p:sldId id="273" r:id="rId18"/>
     <p:sldId id="274" r:id="rId19"/>
-    <p:sldId id="276" r:id="rId20"/>
+    <p:sldId id="279" r:id="rId20"/>
     <p:sldId id="275" r:id="rId21"/>
     <p:sldId id="277" r:id="rId22"/>
     <p:sldId id="278" r:id="rId23"/>
@@ -283,7 +283,7 @@
           <a:p>
             <a:fld id="{C4F46EE1-8E4E-4FE2-8729-DD74CF339378}" type="datetimeFigureOut">
               <a:rPr lang="en-IN" smtClean="0"/>
-              <a:t>08-09-2025</a:t>
+              <a:t>10-09-2025</a:t>
             </a:fld>
             <a:endParaRPr lang="en-IN"/>
           </a:p>
@@ -483,7 +483,7 @@
           <a:p>
             <a:fld id="{C4F46EE1-8E4E-4FE2-8729-DD74CF339378}" type="datetimeFigureOut">
               <a:rPr lang="en-IN" smtClean="0"/>
-              <a:t>08-09-2025</a:t>
+              <a:t>10-09-2025</a:t>
             </a:fld>
             <a:endParaRPr lang="en-IN"/>
           </a:p>
@@ -693,7 +693,7 @@
           <a:p>
             <a:fld id="{C4F46EE1-8E4E-4FE2-8729-DD74CF339378}" type="datetimeFigureOut">
               <a:rPr lang="en-IN" smtClean="0"/>
-              <a:t>08-09-2025</a:t>
+              <a:t>10-09-2025</a:t>
             </a:fld>
             <a:endParaRPr lang="en-IN"/>
           </a:p>
@@ -893,7 +893,7 @@
           <a:p>
             <a:fld id="{C4F46EE1-8E4E-4FE2-8729-DD74CF339378}" type="datetimeFigureOut">
               <a:rPr lang="en-IN" smtClean="0"/>
-              <a:t>08-09-2025</a:t>
+              <a:t>10-09-2025</a:t>
             </a:fld>
             <a:endParaRPr lang="en-IN"/>
           </a:p>
@@ -1169,7 +1169,7 @@
           <a:p>
             <a:fld id="{C4F46EE1-8E4E-4FE2-8729-DD74CF339378}" type="datetimeFigureOut">
               <a:rPr lang="en-IN" smtClean="0"/>
-              <a:t>08-09-2025</a:t>
+              <a:t>10-09-2025</a:t>
             </a:fld>
             <a:endParaRPr lang="en-IN"/>
           </a:p>
@@ -1437,7 +1437,7 @@
           <a:p>
             <a:fld id="{C4F46EE1-8E4E-4FE2-8729-DD74CF339378}" type="datetimeFigureOut">
               <a:rPr lang="en-IN" smtClean="0"/>
-              <a:t>08-09-2025</a:t>
+              <a:t>10-09-2025</a:t>
             </a:fld>
             <a:endParaRPr lang="en-IN"/>
           </a:p>
@@ -1852,7 +1852,7 @@
           <a:p>
             <a:fld id="{C4F46EE1-8E4E-4FE2-8729-DD74CF339378}" type="datetimeFigureOut">
               <a:rPr lang="en-IN" smtClean="0"/>
-              <a:t>08-09-2025</a:t>
+              <a:t>10-09-2025</a:t>
             </a:fld>
             <a:endParaRPr lang="en-IN"/>
           </a:p>
@@ -1994,7 +1994,7 @@
           <a:p>
             <a:fld id="{C4F46EE1-8E4E-4FE2-8729-DD74CF339378}" type="datetimeFigureOut">
               <a:rPr lang="en-IN" smtClean="0"/>
-              <a:t>08-09-2025</a:t>
+              <a:t>10-09-2025</a:t>
             </a:fld>
             <a:endParaRPr lang="en-IN"/>
           </a:p>
@@ -2107,7 +2107,7 @@
           <a:p>
             <a:fld id="{C4F46EE1-8E4E-4FE2-8729-DD74CF339378}" type="datetimeFigureOut">
               <a:rPr lang="en-IN" smtClean="0"/>
-              <a:t>08-09-2025</a:t>
+              <a:t>10-09-2025</a:t>
             </a:fld>
             <a:endParaRPr lang="en-IN"/>
           </a:p>
@@ -2420,7 +2420,7 @@
           <a:p>
             <a:fld id="{C4F46EE1-8E4E-4FE2-8729-DD74CF339378}" type="datetimeFigureOut">
               <a:rPr lang="en-IN" smtClean="0"/>
-              <a:t>08-09-2025</a:t>
+              <a:t>10-09-2025</a:t>
             </a:fld>
             <a:endParaRPr lang="en-IN"/>
           </a:p>
@@ -2709,7 +2709,7 @@
           <a:p>
             <a:fld id="{C4F46EE1-8E4E-4FE2-8729-DD74CF339378}" type="datetimeFigureOut">
               <a:rPr lang="en-IN" smtClean="0"/>
-              <a:t>08-09-2025</a:t>
+              <a:t>10-09-2025</a:t>
             </a:fld>
             <a:endParaRPr lang="en-IN"/>
           </a:p>
@@ -2952,7 +2952,7 @@
           <a:p>
             <a:fld id="{C4F46EE1-8E4E-4FE2-8729-DD74CF339378}" type="datetimeFigureOut">
               <a:rPr lang="en-IN" smtClean="0"/>
-              <a:t>08-09-2025</a:t>
+              <a:t>10-09-2025</a:t>
             </a:fld>
             <a:endParaRPr lang="en-IN"/>
           </a:p>
@@ -7539,13 +7539,7 @@
   <p:cSld>
     <p:spTree>
       <p:nvGrpSpPr>
-        <p:cNvPr id="1" name="">
-          <a:extLst>
-            <a:ext uri="{FF2B5EF4-FFF2-40B4-BE49-F238E27FC236}">
-              <a16:creationId xmlns:a16="http://schemas.microsoft.com/office/drawing/2014/main" id="{094592EA-330D-E5EE-972F-BDECFFBBA4C6}"/>
-            </a:ext>
-          </a:extLst>
-        </p:cNvPr>
+        <p:cNvPr id="1" name=""/>
         <p:cNvGrpSpPr/>
         <p:nvPr/>
       </p:nvGrpSpPr>
@@ -7562,7 +7556,7 @@
           <p:cNvPr id="2" name="Title 1">
             <a:extLst>
               <a:ext uri="{FF2B5EF4-FFF2-40B4-BE49-F238E27FC236}">
-                <a16:creationId xmlns:a16="http://schemas.microsoft.com/office/drawing/2014/main" id="{30732B90-3772-D43C-8CE3-CEC5ECDDD9B7}"/>
+                <a16:creationId xmlns:a16="http://schemas.microsoft.com/office/drawing/2014/main" id="{032C28E1-CDE8-A9B2-5C80-9064CEE3EE76}"/>
               </a:ext>
             </a:extLst>
           </p:cNvPr>
@@ -7573,12 +7567,7 @@
             <p:ph type="title"/>
           </p:nvPr>
         </p:nvSpPr>
-        <p:spPr>
-          <a:xfrm>
-            <a:off x="723900" y="98426"/>
-            <a:ext cx="10515600" cy="882650"/>
-          </a:xfrm>
-        </p:spPr>
+        <p:spPr/>
         <p:txBody>
           <a:bodyPr>
             <a:normAutofit/>
@@ -7590,133 +7579,2317 @@
                 <a:latin typeface="Times New Roman" panose="02020603050405020304" pitchFamily="18" charset="0"/>
                 <a:cs typeface="Times New Roman" panose="02020603050405020304" pitchFamily="18" charset="0"/>
               </a:rPr>
-              <a:t>Classification metrics</a:t>
+              <a:t>TPR and FPR Example</a:t>
             </a:r>
           </a:p>
         </p:txBody>
       </p:sp>
-      <mc:AlternateContent xmlns:mc="http://schemas.openxmlformats.org/markup-compatibility/2006" xmlns:a14="http://schemas.microsoft.com/office/drawing/2010/main">
-        <mc:Choice Requires="a14">
+      <p:graphicFrame>
+        <p:nvGraphicFramePr>
+          <p:cNvPr id="4" name="Content Placeholder 3">
+            <a:extLst>
+              <a:ext uri="{FF2B5EF4-FFF2-40B4-BE49-F238E27FC236}">
+                <a16:creationId xmlns:a16="http://schemas.microsoft.com/office/drawing/2014/main" id="{2F6908D9-FF7D-D53F-62B9-383EAF3B87E2}"/>
+              </a:ext>
+            </a:extLst>
+          </p:cNvPr>
+          <p:cNvGraphicFramePr>
+            <a:graphicFrameLocks noGrp="1"/>
+          </p:cNvGraphicFramePr>
+          <p:nvPr>
+            <p:ph idx="1"/>
+            <p:extLst>
+              <p:ext uri="{D42A27DB-BD31-4B8C-83A1-F6EECF244321}">
+                <p14:modId xmlns:p14="http://schemas.microsoft.com/office/powerpoint/2010/main" val="3086435929"/>
+              </p:ext>
+            </p:extLst>
+          </p:nvPr>
+        </p:nvGraphicFramePr>
+        <p:xfrm>
+          <a:off x="933450" y="2037239"/>
+          <a:ext cx="3619500" cy="4023360"/>
+        </p:xfrm>
+        <a:graphic>
+          <a:graphicData uri="http://schemas.openxmlformats.org/drawingml/2006/table">
+            <a:tbl>
+              <a:tblPr/>
+              <a:tblGrid>
+                <a:gridCol w="1066800">
+                  <a:extLst>
+                    <a:ext uri="{9D8B030D-6E8A-4147-A177-3AD203B41FA5}">
+                      <a16:colId xmlns:a16="http://schemas.microsoft.com/office/drawing/2014/main" val="1163354438"/>
+                    </a:ext>
+                  </a:extLst>
+                </a:gridCol>
+                <a:gridCol w="1219200">
+                  <a:extLst>
+                    <a:ext uri="{9D8B030D-6E8A-4147-A177-3AD203B41FA5}">
+                      <a16:colId xmlns:a16="http://schemas.microsoft.com/office/drawing/2014/main" val="1303654253"/>
+                    </a:ext>
+                  </a:extLst>
+                </a:gridCol>
+                <a:gridCol w="1333500">
+                  <a:extLst>
+                    <a:ext uri="{9D8B030D-6E8A-4147-A177-3AD203B41FA5}">
+                      <a16:colId xmlns:a16="http://schemas.microsoft.com/office/drawing/2014/main" val="3607220883"/>
+                    </a:ext>
+                  </a:extLst>
+                </a:gridCol>
+              </a:tblGrid>
+              <a:tr h="337084">
+                <a:tc>
+                  <a:txBody>
+                    <a:bodyPr/>
+                    <a:lstStyle/>
+                    <a:p>
+                      <a:pPr>
+                        <a:buNone/>
+                      </a:pPr>
+                      <a:r>
+                        <a:rPr lang="en-IN" b="1">
+                          <a:latin typeface="Times New Roman" panose="02020603050405020304" pitchFamily="18" charset="0"/>
+                          <a:cs typeface="Times New Roman" panose="02020603050405020304" pitchFamily="18" charset="0"/>
+                        </a:rPr>
+                        <a:t>Person</a:t>
+                      </a:r>
+                    </a:p>
+                  </a:txBody>
+                  <a:tcPr anchor="ctr">
+                    <a:lnL w="12700" cap="flat" cmpd="sng" algn="ctr">
+                      <a:solidFill>
+                        <a:schemeClr val="tx1"/>
+                      </a:solidFill>
+                      <a:prstDash val="solid"/>
+                      <a:round/>
+                      <a:headEnd type="none" w="med" len="med"/>
+                      <a:tailEnd type="none" w="med" len="med"/>
+                    </a:lnL>
+                    <a:lnR w="12700" cap="flat" cmpd="sng" algn="ctr">
+                      <a:solidFill>
+                        <a:schemeClr val="tx1"/>
+                      </a:solidFill>
+                      <a:prstDash val="solid"/>
+                      <a:round/>
+                      <a:headEnd type="none" w="med" len="med"/>
+                      <a:tailEnd type="none" w="med" len="med"/>
+                    </a:lnR>
+                    <a:lnT w="12700" cap="flat" cmpd="sng" algn="ctr">
+                      <a:solidFill>
+                        <a:schemeClr val="tx1"/>
+                      </a:solidFill>
+                      <a:prstDash val="solid"/>
+                      <a:round/>
+                      <a:headEnd type="none" w="med" len="med"/>
+                      <a:tailEnd type="none" w="med" len="med"/>
+                    </a:lnT>
+                    <a:lnB w="12700" cap="flat" cmpd="sng" algn="ctr">
+                      <a:solidFill>
+                        <a:schemeClr val="tx1"/>
+                      </a:solidFill>
+                      <a:prstDash val="solid"/>
+                      <a:round/>
+                      <a:headEnd type="none" w="med" len="med"/>
+                      <a:tailEnd type="none" w="med" len="med"/>
+                    </a:lnB>
+                    <a:noFill/>
+                  </a:tcPr>
+                </a:tc>
+                <a:tc>
+                  <a:txBody>
+                    <a:bodyPr/>
+                    <a:lstStyle/>
+                    <a:p>
+                      <a:pPr>
+                        <a:buNone/>
+                      </a:pPr>
+                      <a:r>
+                        <a:rPr lang="en-IN" b="1">
+                          <a:latin typeface="Times New Roman" panose="02020603050405020304" pitchFamily="18" charset="0"/>
+                          <a:cs typeface="Times New Roman" panose="02020603050405020304" pitchFamily="18" charset="0"/>
+                        </a:rPr>
+                        <a:t>Actual</a:t>
+                      </a:r>
+                    </a:p>
+                  </a:txBody>
+                  <a:tcPr anchor="ctr">
+                    <a:lnL w="12700" cap="flat" cmpd="sng" algn="ctr">
+                      <a:solidFill>
+                        <a:schemeClr val="tx1"/>
+                      </a:solidFill>
+                      <a:prstDash val="solid"/>
+                      <a:round/>
+                      <a:headEnd type="none" w="med" len="med"/>
+                      <a:tailEnd type="none" w="med" len="med"/>
+                    </a:lnL>
+                    <a:lnR w="12700" cap="flat" cmpd="sng" algn="ctr">
+                      <a:solidFill>
+                        <a:schemeClr val="tx1"/>
+                      </a:solidFill>
+                      <a:prstDash val="solid"/>
+                      <a:round/>
+                      <a:headEnd type="none" w="med" len="med"/>
+                      <a:tailEnd type="none" w="med" len="med"/>
+                    </a:lnR>
+                    <a:lnT w="12700" cap="flat" cmpd="sng" algn="ctr">
+                      <a:solidFill>
+                        <a:schemeClr val="tx1"/>
+                      </a:solidFill>
+                      <a:prstDash val="solid"/>
+                      <a:round/>
+                      <a:headEnd type="none" w="med" len="med"/>
+                      <a:tailEnd type="none" w="med" len="med"/>
+                    </a:lnT>
+                    <a:lnB w="12700" cap="flat" cmpd="sng" algn="ctr">
+                      <a:solidFill>
+                        <a:schemeClr val="tx1"/>
+                      </a:solidFill>
+                      <a:prstDash val="solid"/>
+                      <a:round/>
+                      <a:headEnd type="none" w="med" len="med"/>
+                      <a:tailEnd type="none" w="med" len="med"/>
+                    </a:lnB>
+                    <a:noFill/>
+                  </a:tcPr>
+                </a:tc>
+                <a:tc>
+                  <a:txBody>
+                    <a:bodyPr/>
+                    <a:lstStyle/>
+                    <a:p>
+                      <a:pPr>
+                        <a:buNone/>
+                      </a:pPr>
+                      <a:r>
+                        <a:rPr lang="en-IN" b="1" dirty="0">
+                          <a:latin typeface="Times New Roman" panose="02020603050405020304" pitchFamily="18" charset="0"/>
+                          <a:cs typeface="Times New Roman" panose="02020603050405020304" pitchFamily="18" charset="0"/>
+                        </a:rPr>
+                        <a:t>Predicted</a:t>
+                      </a:r>
+                    </a:p>
+                  </a:txBody>
+                  <a:tcPr anchor="ctr">
+                    <a:lnL w="12700" cap="flat" cmpd="sng" algn="ctr">
+                      <a:solidFill>
+                        <a:schemeClr val="tx1"/>
+                      </a:solidFill>
+                      <a:prstDash val="solid"/>
+                      <a:round/>
+                      <a:headEnd type="none" w="med" len="med"/>
+                      <a:tailEnd type="none" w="med" len="med"/>
+                    </a:lnL>
+                    <a:lnR w="12700" cap="flat" cmpd="sng" algn="ctr">
+                      <a:solidFill>
+                        <a:schemeClr val="tx1"/>
+                      </a:solidFill>
+                      <a:prstDash val="solid"/>
+                      <a:round/>
+                      <a:headEnd type="none" w="med" len="med"/>
+                      <a:tailEnd type="none" w="med" len="med"/>
+                    </a:lnR>
+                    <a:lnT w="12700" cap="flat" cmpd="sng" algn="ctr">
+                      <a:solidFill>
+                        <a:schemeClr val="tx1"/>
+                      </a:solidFill>
+                      <a:prstDash val="solid"/>
+                      <a:round/>
+                      <a:headEnd type="none" w="med" len="med"/>
+                      <a:tailEnd type="none" w="med" len="med"/>
+                    </a:lnT>
+                    <a:lnB w="12700" cap="flat" cmpd="sng" algn="ctr">
+                      <a:solidFill>
+                        <a:schemeClr val="tx1"/>
+                      </a:solidFill>
+                      <a:prstDash val="solid"/>
+                      <a:round/>
+                      <a:headEnd type="none" w="med" len="med"/>
+                      <a:tailEnd type="none" w="med" len="med"/>
+                    </a:lnB>
+                    <a:noFill/>
+                  </a:tcPr>
+                </a:tc>
+                <a:extLst>
+                  <a:ext uri="{0D108BD9-81ED-4DB2-BD59-A6C34878D82A}">
+                    <a16:rowId xmlns:a16="http://schemas.microsoft.com/office/drawing/2014/main" val="3339439217"/>
+                  </a:ext>
+                </a:extLst>
+              </a:tr>
+              <a:tr h="337084">
+                <a:tc>
+                  <a:txBody>
+                    <a:bodyPr/>
+                    <a:lstStyle/>
+                    <a:p>
+                      <a:pPr>
+                        <a:buNone/>
+                      </a:pPr>
+                      <a:r>
+                        <a:rPr lang="en-IN" dirty="0">
+                          <a:latin typeface="Times New Roman" panose="02020603050405020304" pitchFamily="18" charset="0"/>
+                          <a:cs typeface="Times New Roman" panose="02020603050405020304" pitchFamily="18" charset="0"/>
+                        </a:rPr>
+                        <a:t>1</a:t>
+                      </a:r>
+                    </a:p>
+                  </a:txBody>
+                  <a:tcPr anchor="ctr">
+                    <a:lnL w="12700" cap="flat" cmpd="sng" algn="ctr">
+                      <a:solidFill>
+                        <a:schemeClr val="tx1"/>
+                      </a:solidFill>
+                      <a:prstDash val="solid"/>
+                      <a:round/>
+                      <a:headEnd type="none" w="med" len="med"/>
+                      <a:tailEnd type="none" w="med" len="med"/>
+                    </a:lnL>
+                    <a:lnR w="12700" cap="flat" cmpd="sng" algn="ctr">
+                      <a:solidFill>
+                        <a:schemeClr val="tx1"/>
+                      </a:solidFill>
+                      <a:prstDash val="solid"/>
+                      <a:round/>
+                      <a:headEnd type="none" w="med" len="med"/>
+                      <a:tailEnd type="none" w="med" len="med"/>
+                    </a:lnR>
+                    <a:lnT w="12700" cap="flat" cmpd="sng" algn="ctr">
+                      <a:solidFill>
+                        <a:schemeClr val="tx1"/>
+                      </a:solidFill>
+                      <a:prstDash val="solid"/>
+                      <a:round/>
+                      <a:headEnd type="none" w="med" len="med"/>
+                      <a:tailEnd type="none" w="med" len="med"/>
+                    </a:lnT>
+                    <a:lnB w="12700" cap="flat" cmpd="sng" algn="ctr">
+                      <a:solidFill>
+                        <a:schemeClr val="tx1"/>
+                      </a:solidFill>
+                      <a:prstDash val="solid"/>
+                      <a:round/>
+                      <a:headEnd type="none" w="med" len="med"/>
+                      <a:tailEnd type="none" w="med" len="med"/>
+                    </a:lnB>
+                    <a:noFill/>
+                  </a:tcPr>
+                </a:tc>
+                <a:tc>
+                  <a:txBody>
+                    <a:bodyPr/>
+                    <a:lstStyle/>
+                    <a:p>
+                      <a:pPr>
+                        <a:buNone/>
+                      </a:pPr>
+                      <a:r>
+                        <a:rPr lang="en-IN" dirty="0">
+                          <a:latin typeface="Times New Roman" panose="02020603050405020304" pitchFamily="18" charset="0"/>
+                          <a:cs typeface="Times New Roman" panose="02020603050405020304" pitchFamily="18" charset="0"/>
+                        </a:rPr>
+                        <a:t>Sick</a:t>
+                      </a:r>
+                    </a:p>
+                  </a:txBody>
+                  <a:tcPr anchor="ctr">
+                    <a:lnL w="12700" cap="flat" cmpd="sng" algn="ctr">
+                      <a:solidFill>
+                        <a:schemeClr val="tx1"/>
+                      </a:solidFill>
+                      <a:prstDash val="solid"/>
+                      <a:round/>
+                      <a:headEnd type="none" w="med" len="med"/>
+                      <a:tailEnd type="none" w="med" len="med"/>
+                    </a:lnL>
+                    <a:lnR w="12700" cap="flat" cmpd="sng" algn="ctr">
+                      <a:solidFill>
+                        <a:schemeClr val="tx1"/>
+                      </a:solidFill>
+                      <a:prstDash val="solid"/>
+                      <a:round/>
+                      <a:headEnd type="none" w="med" len="med"/>
+                      <a:tailEnd type="none" w="med" len="med"/>
+                    </a:lnR>
+                    <a:lnT w="12700" cap="flat" cmpd="sng" algn="ctr">
+                      <a:solidFill>
+                        <a:schemeClr val="tx1"/>
+                      </a:solidFill>
+                      <a:prstDash val="solid"/>
+                      <a:round/>
+                      <a:headEnd type="none" w="med" len="med"/>
+                      <a:tailEnd type="none" w="med" len="med"/>
+                    </a:lnT>
+                    <a:lnB w="12700" cap="flat" cmpd="sng" algn="ctr">
+                      <a:solidFill>
+                        <a:schemeClr val="tx1"/>
+                      </a:solidFill>
+                      <a:prstDash val="solid"/>
+                      <a:round/>
+                      <a:headEnd type="none" w="med" len="med"/>
+                      <a:tailEnd type="none" w="med" len="med"/>
+                    </a:lnB>
+                    <a:noFill/>
+                  </a:tcPr>
+                </a:tc>
+                <a:tc>
+                  <a:txBody>
+                    <a:bodyPr/>
+                    <a:lstStyle/>
+                    <a:p>
+                      <a:pPr>
+                        <a:buNone/>
+                      </a:pPr>
+                      <a:r>
+                        <a:rPr lang="en-IN">
+                          <a:latin typeface="Times New Roman" panose="02020603050405020304" pitchFamily="18" charset="0"/>
+                          <a:cs typeface="Times New Roman" panose="02020603050405020304" pitchFamily="18" charset="0"/>
+                        </a:rPr>
+                        <a:t>Sick</a:t>
+                      </a:r>
+                    </a:p>
+                  </a:txBody>
+                  <a:tcPr anchor="ctr">
+                    <a:lnL w="12700" cap="flat" cmpd="sng" algn="ctr">
+                      <a:solidFill>
+                        <a:schemeClr val="tx1"/>
+                      </a:solidFill>
+                      <a:prstDash val="solid"/>
+                      <a:round/>
+                      <a:headEnd type="none" w="med" len="med"/>
+                      <a:tailEnd type="none" w="med" len="med"/>
+                    </a:lnL>
+                    <a:lnR w="12700" cap="flat" cmpd="sng" algn="ctr">
+                      <a:solidFill>
+                        <a:schemeClr val="tx1"/>
+                      </a:solidFill>
+                      <a:prstDash val="solid"/>
+                      <a:round/>
+                      <a:headEnd type="none" w="med" len="med"/>
+                      <a:tailEnd type="none" w="med" len="med"/>
+                    </a:lnR>
+                    <a:lnT w="12700" cap="flat" cmpd="sng" algn="ctr">
+                      <a:solidFill>
+                        <a:schemeClr val="tx1"/>
+                      </a:solidFill>
+                      <a:prstDash val="solid"/>
+                      <a:round/>
+                      <a:headEnd type="none" w="med" len="med"/>
+                      <a:tailEnd type="none" w="med" len="med"/>
+                    </a:lnT>
+                    <a:lnB w="12700" cap="flat" cmpd="sng" algn="ctr">
+                      <a:solidFill>
+                        <a:schemeClr val="tx1"/>
+                      </a:solidFill>
+                      <a:prstDash val="solid"/>
+                      <a:round/>
+                      <a:headEnd type="none" w="med" len="med"/>
+                      <a:tailEnd type="none" w="med" len="med"/>
+                    </a:lnB>
+                    <a:noFill/>
+                  </a:tcPr>
+                </a:tc>
+                <a:extLst>
+                  <a:ext uri="{0D108BD9-81ED-4DB2-BD59-A6C34878D82A}">
+                    <a16:rowId xmlns:a16="http://schemas.microsoft.com/office/drawing/2014/main" val="2788048264"/>
+                  </a:ext>
+                </a:extLst>
+              </a:tr>
+              <a:tr h="337084">
+                <a:tc>
+                  <a:txBody>
+                    <a:bodyPr/>
+                    <a:lstStyle/>
+                    <a:p>
+                      <a:pPr>
+                        <a:buNone/>
+                      </a:pPr>
+                      <a:r>
+                        <a:rPr lang="en-IN" dirty="0">
+                          <a:latin typeface="Times New Roman" panose="02020603050405020304" pitchFamily="18" charset="0"/>
+                          <a:cs typeface="Times New Roman" panose="02020603050405020304" pitchFamily="18" charset="0"/>
+                        </a:rPr>
+                        <a:t>2</a:t>
+                      </a:r>
+                    </a:p>
+                  </a:txBody>
+                  <a:tcPr anchor="ctr">
+                    <a:lnL w="12700" cap="flat" cmpd="sng" algn="ctr">
+                      <a:solidFill>
+                        <a:schemeClr val="tx1"/>
+                      </a:solidFill>
+                      <a:prstDash val="solid"/>
+                      <a:round/>
+                      <a:headEnd type="none" w="med" len="med"/>
+                      <a:tailEnd type="none" w="med" len="med"/>
+                    </a:lnL>
+                    <a:lnR w="12700" cap="flat" cmpd="sng" algn="ctr">
+                      <a:solidFill>
+                        <a:schemeClr val="tx1"/>
+                      </a:solidFill>
+                      <a:prstDash val="solid"/>
+                      <a:round/>
+                      <a:headEnd type="none" w="med" len="med"/>
+                      <a:tailEnd type="none" w="med" len="med"/>
+                    </a:lnR>
+                    <a:lnT w="12700" cap="flat" cmpd="sng" algn="ctr">
+                      <a:solidFill>
+                        <a:schemeClr val="tx1"/>
+                      </a:solidFill>
+                      <a:prstDash val="solid"/>
+                      <a:round/>
+                      <a:headEnd type="none" w="med" len="med"/>
+                      <a:tailEnd type="none" w="med" len="med"/>
+                    </a:lnT>
+                    <a:lnB w="12700" cap="flat" cmpd="sng" algn="ctr">
+                      <a:solidFill>
+                        <a:schemeClr val="tx1"/>
+                      </a:solidFill>
+                      <a:prstDash val="solid"/>
+                      <a:round/>
+                      <a:headEnd type="none" w="med" len="med"/>
+                      <a:tailEnd type="none" w="med" len="med"/>
+                    </a:lnB>
+                    <a:noFill/>
+                  </a:tcPr>
+                </a:tc>
+                <a:tc>
+                  <a:txBody>
+                    <a:bodyPr/>
+                    <a:lstStyle/>
+                    <a:p>
+                      <a:pPr>
+                        <a:buNone/>
+                      </a:pPr>
+                      <a:r>
+                        <a:rPr lang="en-IN" dirty="0">
+                          <a:latin typeface="Times New Roman" panose="02020603050405020304" pitchFamily="18" charset="0"/>
+                          <a:cs typeface="Times New Roman" panose="02020603050405020304" pitchFamily="18" charset="0"/>
+                        </a:rPr>
+                        <a:t>Sick</a:t>
+                      </a:r>
+                    </a:p>
+                  </a:txBody>
+                  <a:tcPr anchor="ctr">
+                    <a:lnL w="12700" cap="flat" cmpd="sng" algn="ctr">
+                      <a:solidFill>
+                        <a:schemeClr val="tx1"/>
+                      </a:solidFill>
+                      <a:prstDash val="solid"/>
+                      <a:round/>
+                      <a:headEnd type="none" w="med" len="med"/>
+                      <a:tailEnd type="none" w="med" len="med"/>
+                    </a:lnL>
+                    <a:lnR w="12700" cap="flat" cmpd="sng" algn="ctr">
+                      <a:solidFill>
+                        <a:schemeClr val="tx1"/>
+                      </a:solidFill>
+                      <a:prstDash val="solid"/>
+                      <a:round/>
+                      <a:headEnd type="none" w="med" len="med"/>
+                      <a:tailEnd type="none" w="med" len="med"/>
+                    </a:lnR>
+                    <a:lnT w="12700" cap="flat" cmpd="sng" algn="ctr">
+                      <a:solidFill>
+                        <a:schemeClr val="tx1"/>
+                      </a:solidFill>
+                      <a:prstDash val="solid"/>
+                      <a:round/>
+                      <a:headEnd type="none" w="med" len="med"/>
+                      <a:tailEnd type="none" w="med" len="med"/>
+                    </a:lnT>
+                    <a:lnB w="12700" cap="flat" cmpd="sng" algn="ctr">
+                      <a:solidFill>
+                        <a:schemeClr val="tx1"/>
+                      </a:solidFill>
+                      <a:prstDash val="solid"/>
+                      <a:round/>
+                      <a:headEnd type="none" w="med" len="med"/>
+                      <a:tailEnd type="none" w="med" len="med"/>
+                    </a:lnB>
+                    <a:noFill/>
+                  </a:tcPr>
+                </a:tc>
+                <a:tc>
+                  <a:txBody>
+                    <a:bodyPr/>
+                    <a:lstStyle/>
+                    <a:p>
+                      <a:pPr>
+                        <a:buNone/>
+                      </a:pPr>
+                      <a:r>
+                        <a:rPr lang="en-IN">
+                          <a:latin typeface="Times New Roman" panose="02020603050405020304" pitchFamily="18" charset="0"/>
+                          <a:cs typeface="Times New Roman" panose="02020603050405020304" pitchFamily="18" charset="0"/>
+                        </a:rPr>
+                        <a:t>Sick</a:t>
+                      </a:r>
+                    </a:p>
+                  </a:txBody>
+                  <a:tcPr anchor="ctr">
+                    <a:lnL w="12700" cap="flat" cmpd="sng" algn="ctr">
+                      <a:solidFill>
+                        <a:schemeClr val="tx1"/>
+                      </a:solidFill>
+                      <a:prstDash val="solid"/>
+                      <a:round/>
+                      <a:headEnd type="none" w="med" len="med"/>
+                      <a:tailEnd type="none" w="med" len="med"/>
+                    </a:lnL>
+                    <a:lnR w="12700" cap="flat" cmpd="sng" algn="ctr">
+                      <a:solidFill>
+                        <a:schemeClr val="tx1"/>
+                      </a:solidFill>
+                      <a:prstDash val="solid"/>
+                      <a:round/>
+                      <a:headEnd type="none" w="med" len="med"/>
+                      <a:tailEnd type="none" w="med" len="med"/>
+                    </a:lnR>
+                    <a:lnT w="12700" cap="flat" cmpd="sng" algn="ctr">
+                      <a:solidFill>
+                        <a:schemeClr val="tx1"/>
+                      </a:solidFill>
+                      <a:prstDash val="solid"/>
+                      <a:round/>
+                      <a:headEnd type="none" w="med" len="med"/>
+                      <a:tailEnd type="none" w="med" len="med"/>
+                    </a:lnT>
+                    <a:lnB w="12700" cap="flat" cmpd="sng" algn="ctr">
+                      <a:solidFill>
+                        <a:schemeClr val="tx1"/>
+                      </a:solidFill>
+                      <a:prstDash val="solid"/>
+                      <a:round/>
+                      <a:headEnd type="none" w="med" len="med"/>
+                      <a:tailEnd type="none" w="med" len="med"/>
+                    </a:lnB>
+                    <a:noFill/>
+                  </a:tcPr>
+                </a:tc>
+                <a:extLst>
+                  <a:ext uri="{0D108BD9-81ED-4DB2-BD59-A6C34878D82A}">
+                    <a16:rowId xmlns:a16="http://schemas.microsoft.com/office/drawing/2014/main" val="4118192888"/>
+                  </a:ext>
+                </a:extLst>
+              </a:tr>
+              <a:tr h="337084">
+                <a:tc>
+                  <a:txBody>
+                    <a:bodyPr/>
+                    <a:lstStyle/>
+                    <a:p>
+                      <a:pPr>
+                        <a:buNone/>
+                      </a:pPr>
+                      <a:r>
+                        <a:rPr lang="en-IN">
+                          <a:latin typeface="Times New Roman" panose="02020603050405020304" pitchFamily="18" charset="0"/>
+                          <a:cs typeface="Times New Roman" panose="02020603050405020304" pitchFamily="18" charset="0"/>
+                        </a:rPr>
+                        <a:t>3</a:t>
+                      </a:r>
+                    </a:p>
+                  </a:txBody>
+                  <a:tcPr anchor="ctr">
+                    <a:lnL w="12700" cap="flat" cmpd="sng" algn="ctr">
+                      <a:solidFill>
+                        <a:schemeClr val="tx1"/>
+                      </a:solidFill>
+                      <a:prstDash val="solid"/>
+                      <a:round/>
+                      <a:headEnd type="none" w="med" len="med"/>
+                      <a:tailEnd type="none" w="med" len="med"/>
+                    </a:lnL>
+                    <a:lnR w="12700" cap="flat" cmpd="sng" algn="ctr">
+                      <a:solidFill>
+                        <a:schemeClr val="tx1"/>
+                      </a:solidFill>
+                      <a:prstDash val="solid"/>
+                      <a:round/>
+                      <a:headEnd type="none" w="med" len="med"/>
+                      <a:tailEnd type="none" w="med" len="med"/>
+                    </a:lnR>
+                    <a:lnT w="12700" cap="flat" cmpd="sng" algn="ctr">
+                      <a:solidFill>
+                        <a:schemeClr val="tx1"/>
+                      </a:solidFill>
+                      <a:prstDash val="solid"/>
+                      <a:round/>
+                      <a:headEnd type="none" w="med" len="med"/>
+                      <a:tailEnd type="none" w="med" len="med"/>
+                    </a:lnT>
+                    <a:lnB w="12700" cap="flat" cmpd="sng" algn="ctr">
+                      <a:solidFill>
+                        <a:schemeClr val="tx1"/>
+                      </a:solidFill>
+                      <a:prstDash val="solid"/>
+                      <a:round/>
+                      <a:headEnd type="none" w="med" len="med"/>
+                      <a:tailEnd type="none" w="med" len="med"/>
+                    </a:lnB>
+                    <a:noFill/>
+                  </a:tcPr>
+                </a:tc>
+                <a:tc>
+                  <a:txBody>
+                    <a:bodyPr/>
+                    <a:lstStyle/>
+                    <a:p>
+                      <a:pPr>
+                        <a:buNone/>
+                      </a:pPr>
+                      <a:r>
+                        <a:rPr lang="en-IN" dirty="0">
+                          <a:latin typeface="Times New Roman" panose="02020603050405020304" pitchFamily="18" charset="0"/>
+                          <a:cs typeface="Times New Roman" panose="02020603050405020304" pitchFamily="18" charset="0"/>
+                        </a:rPr>
+                        <a:t>Sick</a:t>
+                      </a:r>
+                    </a:p>
+                  </a:txBody>
+                  <a:tcPr anchor="ctr">
+                    <a:lnL w="12700" cap="flat" cmpd="sng" algn="ctr">
+                      <a:solidFill>
+                        <a:schemeClr val="tx1"/>
+                      </a:solidFill>
+                      <a:prstDash val="solid"/>
+                      <a:round/>
+                      <a:headEnd type="none" w="med" len="med"/>
+                      <a:tailEnd type="none" w="med" len="med"/>
+                    </a:lnL>
+                    <a:lnR w="12700" cap="flat" cmpd="sng" algn="ctr">
+                      <a:solidFill>
+                        <a:schemeClr val="tx1"/>
+                      </a:solidFill>
+                      <a:prstDash val="solid"/>
+                      <a:round/>
+                      <a:headEnd type="none" w="med" len="med"/>
+                      <a:tailEnd type="none" w="med" len="med"/>
+                    </a:lnR>
+                    <a:lnT w="12700" cap="flat" cmpd="sng" algn="ctr">
+                      <a:solidFill>
+                        <a:schemeClr val="tx1"/>
+                      </a:solidFill>
+                      <a:prstDash val="solid"/>
+                      <a:round/>
+                      <a:headEnd type="none" w="med" len="med"/>
+                      <a:tailEnd type="none" w="med" len="med"/>
+                    </a:lnT>
+                    <a:lnB w="12700" cap="flat" cmpd="sng" algn="ctr">
+                      <a:solidFill>
+                        <a:schemeClr val="tx1"/>
+                      </a:solidFill>
+                      <a:prstDash val="solid"/>
+                      <a:round/>
+                      <a:headEnd type="none" w="med" len="med"/>
+                      <a:tailEnd type="none" w="med" len="med"/>
+                    </a:lnB>
+                    <a:noFill/>
+                  </a:tcPr>
+                </a:tc>
+                <a:tc>
+                  <a:txBody>
+                    <a:bodyPr/>
+                    <a:lstStyle/>
+                    <a:p>
+                      <a:pPr>
+                        <a:buNone/>
+                      </a:pPr>
+                      <a:r>
+                        <a:rPr lang="en-IN">
+                          <a:latin typeface="Times New Roman" panose="02020603050405020304" pitchFamily="18" charset="0"/>
+                          <a:cs typeface="Times New Roman" panose="02020603050405020304" pitchFamily="18" charset="0"/>
+                        </a:rPr>
+                        <a:t>Healthy</a:t>
+                      </a:r>
+                    </a:p>
+                  </a:txBody>
+                  <a:tcPr anchor="ctr">
+                    <a:lnL w="12700" cap="flat" cmpd="sng" algn="ctr">
+                      <a:solidFill>
+                        <a:schemeClr val="tx1"/>
+                      </a:solidFill>
+                      <a:prstDash val="solid"/>
+                      <a:round/>
+                      <a:headEnd type="none" w="med" len="med"/>
+                      <a:tailEnd type="none" w="med" len="med"/>
+                    </a:lnL>
+                    <a:lnR w="12700" cap="flat" cmpd="sng" algn="ctr">
+                      <a:solidFill>
+                        <a:schemeClr val="tx1"/>
+                      </a:solidFill>
+                      <a:prstDash val="solid"/>
+                      <a:round/>
+                      <a:headEnd type="none" w="med" len="med"/>
+                      <a:tailEnd type="none" w="med" len="med"/>
+                    </a:lnR>
+                    <a:lnT w="12700" cap="flat" cmpd="sng" algn="ctr">
+                      <a:solidFill>
+                        <a:schemeClr val="tx1"/>
+                      </a:solidFill>
+                      <a:prstDash val="solid"/>
+                      <a:round/>
+                      <a:headEnd type="none" w="med" len="med"/>
+                      <a:tailEnd type="none" w="med" len="med"/>
+                    </a:lnT>
+                    <a:lnB w="12700" cap="flat" cmpd="sng" algn="ctr">
+                      <a:solidFill>
+                        <a:schemeClr val="tx1"/>
+                      </a:solidFill>
+                      <a:prstDash val="solid"/>
+                      <a:round/>
+                      <a:headEnd type="none" w="med" len="med"/>
+                      <a:tailEnd type="none" w="med" len="med"/>
+                    </a:lnB>
+                    <a:noFill/>
+                  </a:tcPr>
+                </a:tc>
+                <a:extLst>
+                  <a:ext uri="{0D108BD9-81ED-4DB2-BD59-A6C34878D82A}">
+                    <a16:rowId xmlns:a16="http://schemas.microsoft.com/office/drawing/2014/main" val="3424462811"/>
+                  </a:ext>
+                </a:extLst>
+              </a:tr>
+              <a:tr h="337084">
+                <a:tc>
+                  <a:txBody>
+                    <a:bodyPr/>
+                    <a:lstStyle/>
+                    <a:p>
+                      <a:pPr>
+                        <a:buNone/>
+                      </a:pPr>
+                      <a:r>
+                        <a:rPr lang="en-IN">
+                          <a:latin typeface="Times New Roman" panose="02020603050405020304" pitchFamily="18" charset="0"/>
+                          <a:cs typeface="Times New Roman" panose="02020603050405020304" pitchFamily="18" charset="0"/>
+                        </a:rPr>
+                        <a:t>4</a:t>
+                      </a:r>
+                    </a:p>
+                  </a:txBody>
+                  <a:tcPr anchor="ctr">
+                    <a:lnL w="12700" cap="flat" cmpd="sng" algn="ctr">
+                      <a:solidFill>
+                        <a:schemeClr val="tx1"/>
+                      </a:solidFill>
+                      <a:prstDash val="solid"/>
+                      <a:round/>
+                      <a:headEnd type="none" w="med" len="med"/>
+                      <a:tailEnd type="none" w="med" len="med"/>
+                    </a:lnL>
+                    <a:lnR w="12700" cap="flat" cmpd="sng" algn="ctr">
+                      <a:solidFill>
+                        <a:schemeClr val="tx1"/>
+                      </a:solidFill>
+                      <a:prstDash val="solid"/>
+                      <a:round/>
+                      <a:headEnd type="none" w="med" len="med"/>
+                      <a:tailEnd type="none" w="med" len="med"/>
+                    </a:lnR>
+                    <a:lnT w="12700" cap="flat" cmpd="sng" algn="ctr">
+                      <a:solidFill>
+                        <a:schemeClr val="tx1"/>
+                      </a:solidFill>
+                      <a:prstDash val="solid"/>
+                      <a:round/>
+                      <a:headEnd type="none" w="med" len="med"/>
+                      <a:tailEnd type="none" w="med" len="med"/>
+                    </a:lnT>
+                    <a:lnB w="12700" cap="flat" cmpd="sng" algn="ctr">
+                      <a:solidFill>
+                        <a:schemeClr val="tx1"/>
+                      </a:solidFill>
+                      <a:prstDash val="solid"/>
+                      <a:round/>
+                      <a:headEnd type="none" w="med" len="med"/>
+                      <a:tailEnd type="none" w="med" len="med"/>
+                    </a:lnB>
+                    <a:noFill/>
+                  </a:tcPr>
+                </a:tc>
+                <a:tc>
+                  <a:txBody>
+                    <a:bodyPr/>
+                    <a:lstStyle/>
+                    <a:p>
+                      <a:pPr>
+                        <a:buNone/>
+                      </a:pPr>
+                      <a:r>
+                        <a:rPr lang="en-IN">
+                          <a:latin typeface="Times New Roman" panose="02020603050405020304" pitchFamily="18" charset="0"/>
+                          <a:cs typeface="Times New Roman" panose="02020603050405020304" pitchFamily="18" charset="0"/>
+                        </a:rPr>
+                        <a:t>Sick</a:t>
+                      </a:r>
+                    </a:p>
+                  </a:txBody>
+                  <a:tcPr anchor="ctr">
+                    <a:lnL w="12700" cap="flat" cmpd="sng" algn="ctr">
+                      <a:solidFill>
+                        <a:schemeClr val="tx1"/>
+                      </a:solidFill>
+                      <a:prstDash val="solid"/>
+                      <a:round/>
+                      <a:headEnd type="none" w="med" len="med"/>
+                      <a:tailEnd type="none" w="med" len="med"/>
+                    </a:lnL>
+                    <a:lnR w="12700" cap="flat" cmpd="sng" algn="ctr">
+                      <a:solidFill>
+                        <a:schemeClr val="tx1"/>
+                      </a:solidFill>
+                      <a:prstDash val="solid"/>
+                      <a:round/>
+                      <a:headEnd type="none" w="med" len="med"/>
+                      <a:tailEnd type="none" w="med" len="med"/>
+                    </a:lnR>
+                    <a:lnT w="12700" cap="flat" cmpd="sng" algn="ctr">
+                      <a:solidFill>
+                        <a:schemeClr val="tx1"/>
+                      </a:solidFill>
+                      <a:prstDash val="solid"/>
+                      <a:round/>
+                      <a:headEnd type="none" w="med" len="med"/>
+                      <a:tailEnd type="none" w="med" len="med"/>
+                    </a:lnT>
+                    <a:lnB w="12700" cap="flat" cmpd="sng" algn="ctr">
+                      <a:solidFill>
+                        <a:schemeClr val="tx1"/>
+                      </a:solidFill>
+                      <a:prstDash val="solid"/>
+                      <a:round/>
+                      <a:headEnd type="none" w="med" len="med"/>
+                      <a:tailEnd type="none" w="med" len="med"/>
+                    </a:lnB>
+                    <a:noFill/>
+                  </a:tcPr>
+                </a:tc>
+                <a:tc>
+                  <a:txBody>
+                    <a:bodyPr/>
+                    <a:lstStyle/>
+                    <a:p>
+                      <a:pPr>
+                        <a:buNone/>
+                      </a:pPr>
+                      <a:r>
+                        <a:rPr lang="en-IN">
+                          <a:latin typeface="Times New Roman" panose="02020603050405020304" pitchFamily="18" charset="0"/>
+                          <a:cs typeface="Times New Roman" panose="02020603050405020304" pitchFamily="18" charset="0"/>
+                        </a:rPr>
+                        <a:t>Sick</a:t>
+                      </a:r>
+                    </a:p>
+                  </a:txBody>
+                  <a:tcPr anchor="ctr">
+                    <a:lnL w="12700" cap="flat" cmpd="sng" algn="ctr">
+                      <a:solidFill>
+                        <a:schemeClr val="tx1"/>
+                      </a:solidFill>
+                      <a:prstDash val="solid"/>
+                      <a:round/>
+                      <a:headEnd type="none" w="med" len="med"/>
+                      <a:tailEnd type="none" w="med" len="med"/>
+                    </a:lnL>
+                    <a:lnR w="12700" cap="flat" cmpd="sng" algn="ctr">
+                      <a:solidFill>
+                        <a:schemeClr val="tx1"/>
+                      </a:solidFill>
+                      <a:prstDash val="solid"/>
+                      <a:round/>
+                      <a:headEnd type="none" w="med" len="med"/>
+                      <a:tailEnd type="none" w="med" len="med"/>
+                    </a:lnR>
+                    <a:lnT w="12700" cap="flat" cmpd="sng" algn="ctr">
+                      <a:solidFill>
+                        <a:schemeClr val="tx1"/>
+                      </a:solidFill>
+                      <a:prstDash val="solid"/>
+                      <a:round/>
+                      <a:headEnd type="none" w="med" len="med"/>
+                      <a:tailEnd type="none" w="med" len="med"/>
+                    </a:lnT>
+                    <a:lnB w="12700" cap="flat" cmpd="sng" algn="ctr">
+                      <a:solidFill>
+                        <a:schemeClr val="tx1"/>
+                      </a:solidFill>
+                      <a:prstDash val="solid"/>
+                      <a:round/>
+                      <a:headEnd type="none" w="med" len="med"/>
+                      <a:tailEnd type="none" w="med" len="med"/>
+                    </a:lnB>
+                    <a:noFill/>
+                  </a:tcPr>
+                </a:tc>
+                <a:extLst>
+                  <a:ext uri="{0D108BD9-81ED-4DB2-BD59-A6C34878D82A}">
+                    <a16:rowId xmlns:a16="http://schemas.microsoft.com/office/drawing/2014/main" val="4049039343"/>
+                  </a:ext>
+                </a:extLst>
+              </a:tr>
+              <a:tr h="337084">
+                <a:tc>
+                  <a:txBody>
+                    <a:bodyPr/>
+                    <a:lstStyle/>
+                    <a:p>
+                      <a:pPr>
+                        <a:buNone/>
+                      </a:pPr>
+                      <a:r>
+                        <a:rPr lang="en-IN">
+                          <a:latin typeface="Times New Roman" panose="02020603050405020304" pitchFamily="18" charset="0"/>
+                          <a:cs typeface="Times New Roman" panose="02020603050405020304" pitchFamily="18" charset="0"/>
+                        </a:rPr>
+                        <a:t>5</a:t>
+                      </a:r>
+                    </a:p>
+                  </a:txBody>
+                  <a:tcPr anchor="ctr">
+                    <a:lnL w="12700" cap="flat" cmpd="sng" algn="ctr">
+                      <a:solidFill>
+                        <a:schemeClr val="tx1"/>
+                      </a:solidFill>
+                      <a:prstDash val="solid"/>
+                      <a:round/>
+                      <a:headEnd type="none" w="med" len="med"/>
+                      <a:tailEnd type="none" w="med" len="med"/>
+                    </a:lnL>
+                    <a:lnR w="12700" cap="flat" cmpd="sng" algn="ctr">
+                      <a:solidFill>
+                        <a:schemeClr val="tx1"/>
+                      </a:solidFill>
+                      <a:prstDash val="solid"/>
+                      <a:round/>
+                      <a:headEnd type="none" w="med" len="med"/>
+                      <a:tailEnd type="none" w="med" len="med"/>
+                    </a:lnR>
+                    <a:lnT w="12700" cap="flat" cmpd="sng" algn="ctr">
+                      <a:solidFill>
+                        <a:schemeClr val="tx1"/>
+                      </a:solidFill>
+                      <a:prstDash val="solid"/>
+                      <a:round/>
+                      <a:headEnd type="none" w="med" len="med"/>
+                      <a:tailEnd type="none" w="med" len="med"/>
+                    </a:lnT>
+                    <a:lnB w="12700" cap="flat" cmpd="sng" algn="ctr">
+                      <a:solidFill>
+                        <a:schemeClr val="tx1"/>
+                      </a:solidFill>
+                      <a:prstDash val="solid"/>
+                      <a:round/>
+                      <a:headEnd type="none" w="med" len="med"/>
+                      <a:tailEnd type="none" w="med" len="med"/>
+                    </a:lnB>
+                    <a:noFill/>
+                  </a:tcPr>
+                </a:tc>
+                <a:tc>
+                  <a:txBody>
+                    <a:bodyPr/>
+                    <a:lstStyle/>
+                    <a:p>
+                      <a:pPr>
+                        <a:buNone/>
+                      </a:pPr>
+                      <a:r>
+                        <a:rPr lang="en-IN">
+                          <a:latin typeface="Times New Roman" panose="02020603050405020304" pitchFamily="18" charset="0"/>
+                          <a:cs typeface="Times New Roman" panose="02020603050405020304" pitchFamily="18" charset="0"/>
+                        </a:rPr>
+                        <a:t>Healthy</a:t>
+                      </a:r>
+                    </a:p>
+                  </a:txBody>
+                  <a:tcPr anchor="ctr">
+                    <a:lnL w="12700" cap="flat" cmpd="sng" algn="ctr">
+                      <a:solidFill>
+                        <a:schemeClr val="tx1"/>
+                      </a:solidFill>
+                      <a:prstDash val="solid"/>
+                      <a:round/>
+                      <a:headEnd type="none" w="med" len="med"/>
+                      <a:tailEnd type="none" w="med" len="med"/>
+                    </a:lnL>
+                    <a:lnR w="12700" cap="flat" cmpd="sng" algn="ctr">
+                      <a:solidFill>
+                        <a:schemeClr val="tx1"/>
+                      </a:solidFill>
+                      <a:prstDash val="solid"/>
+                      <a:round/>
+                      <a:headEnd type="none" w="med" len="med"/>
+                      <a:tailEnd type="none" w="med" len="med"/>
+                    </a:lnR>
+                    <a:lnT w="12700" cap="flat" cmpd="sng" algn="ctr">
+                      <a:solidFill>
+                        <a:schemeClr val="tx1"/>
+                      </a:solidFill>
+                      <a:prstDash val="solid"/>
+                      <a:round/>
+                      <a:headEnd type="none" w="med" len="med"/>
+                      <a:tailEnd type="none" w="med" len="med"/>
+                    </a:lnT>
+                    <a:lnB w="12700" cap="flat" cmpd="sng" algn="ctr">
+                      <a:solidFill>
+                        <a:schemeClr val="tx1"/>
+                      </a:solidFill>
+                      <a:prstDash val="solid"/>
+                      <a:round/>
+                      <a:headEnd type="none" w="med" len="med"/>
+                      <a:tailEnd type="none" w="med" len="med"/>
+                    </a:lnB>
+                    <a:noFill/>
+                  </a:tcPr>
+                </a:tc>
+                <a:tc>
+                  <a:txBody>
+                    <a:bodyPr/>
+                    <a:lstStyle/>
+                    <a:p>
+                      <a:pPr>
+                        <a:buNone/>
+                      </a:pPr>
+                      <a:r>
+                        <a:rPr lang="en-IN">
+                          <a:latin typeface="Times New Roman" panose="02020603050405020304" pitchFamily="18" charset="0"/>
+                          <a:cs typeface="Times New Roman" panose="02020603050405020304" pitchFamily="18" charset="0"/>
+                        </a:rPr>
+                        <a:t>Healthy</a:t>
+                      </a:r>
+                    </a:p>
+                  </a:txBody>
+                  <a:tcPr anchor="ctr">
+                    <a:lnL w="12700" cap="flat" cmpd="sng" algn="ctr">
+                      <a:solidFill>
+                        <a:schemeClr val="tx1"/>
+                      </a:solidFill>
+                      <a:prstDash val="solid"/>
+                      <a:round/>
+                      <a:headEnd type="none" w="med" len="med"/>
+                      <a:tailEnd type="none" w="med" len="med"/>
+                    </a:lnL>
+                    <a:lnR w="12700" cap="flat" cmpd="sng" algn="ctr">
+                      <a:solidFill>
+                        <a:schemeClr val="tx1"/>
+                      </a:solidFill>
+                      <a:prstDash val="solid"/>
+                      <a:round/>
+                      <a:headEnd type="none" w="med" len="med"/>
+                      <a:tailEnd type="none" w="med" len="med"/>
+                    </a:lnR>
+                    <a:lnT w="12700" cap="flat" cmpd="sng" algn="ctr">
+                      <a:solidFill>
+                        <a:schemeClr val="tx1"/>
+                      </a:solidFill>
+                      <a:prstDash val="solid"/>
+                      <a:round/>
+                      <a:headEnd type="none" w="med" len="med"/>
+                      <a:tailEnd type="none" w="med" len="med"/>
+                    </a:lnT>
+                    <a:lnB w="12700" cap="flat" cmpd="sng" algn="ctr">
+                      <a:solidFill>
+                        <a:schemeClr val="tx1"/>
+                      </a:solidFill>
+                      <a:prstDash val="solid"/>
+                      <a:round/>
+                      <a:headEnd type="none" w="med" len="med"/>
+                      <a:tailEnd type="none" w="med" len="med"/>
+                    </a:lnB>
+                    <a:noFill/>
+                  </a:tcPr>
+                </a:tc>
+                <a:extLst>
+                  <a:ext uri="{0D108BD9-81ED-4DB2-BD59-A6C34878D82A}">
+                    <a16:rowId xmlns:a16="http://schemas.microsoft.com/office/drawing/2014/main" val="3538611249"/>
+                  </a:ext>
+                </a:extLst>
+              </a:tr>
+              <a:tr h="337084">
+                <a:tc>
+                  <a:txBody>
+                    <a:bodyPr/>
+                    <a:lstStyle/>
+                    <a:p>
+                      <a:pPr>
+                        <a:buNone/>
+                      </a:pPr>
+                      <a:r>
+                        <a:rPr lang="en-IN">
+                          <a:latin typeface="Times New Roman" panose="02020603050405020304" pitchFamily="18" charset="0"/>
+                          <a:cs typeface="Times New Roman" panose="02020603050405020304" pitchFamily="18" charset="0"/>
+                        </a:rPr>
+                        <a:t>6</a:t>
+                      </a:r>
+                    </a:p>
+                  </a:txBody>
+                  <a:tcPr anchor="ctr">
+                    <a:lnL w="12700" cap="flat" cmpd="sng" algn="ctr">
+                      <a:solidFill>
+                        <a:schemeClr val="tx1"/>
+                      </a:solidFill>
+                      <a:prstDash val="solid"/>
+                      <a:round/>
+                      <a:headEnd type="none" w="med" len="med"/>
+                      <a:tailEnd type="none" w="med" len="med"/>
+                    </a:lnL>
+                    <a:lnR w="12700" cap="flat" cmpd="sng" algn="ctr">
+                      <a:solidFill>
+                        <a:schemeClr val="tx1"/>
+                      </a:solidFill>
+                      <a:prstDash val="solid"/>
+                      <a:round/>
+                      <a:headEnd type="none" w="med" len="med"/>
+                      <a:tailEnd type="none" w="med" len="med"/>
+                    </a:lnR>
+                    <a:lnT w="12700" cap="flat" cmpd="sng" algn="ctr">
+                      <a:solidFill>
+                        <a:schemeClr val="tx1"/>
+                      </a:solidFill>
+                      <a:prstDash val="solid"/>
+                      <a:round/>
+                      <a:headEnd type="none" w="med" len="med"/>
+                      <a:tailEnd type="none" w="med" len="med"/>
+                    </a:lnT>
+                    <a:lnB w="12700" cap="flat" cmpd="sng" algn="ctr">
+                      <a:solidFill>
+                        <a:schemeClr val="tx1"/>
+                      </a:solidFill>
+                      <a:prstDash val="solid"/>
+                      <a:round/>
+                      <a:headEnd type="none" w="med" len="med"/>
+                      <a:tailEnd type="none" w="med" len="med"/>
+                    </a:lnB>
+                    <a:noFill/>
+                  </a:tcPr>
+                </a:tc>
+                <a:tc>
+                  <a:txBody>
+                    <a:bodyPr/>
+                    <a:lstStyle/>
+                    <a:p>
+                      <a:pPr>
+                        <a:buNone/>
+                      </a:pPr>
+                      <a:r>
+                        <a:rPr lang="en-IN">
+                          <a:latin typeface="Times New Roman" panose="02020603050405020304" pitchFamily="18" charset="0"/>
+                          <a:cs typeface="Times New Roman" panose="02020603050405020304" pitchFamily="18" charset="0"/>
+                        </a:rPr>
+                        <a:t>Healthy</a:t>
+                      </a:r>
+                    </a:p>
+                  </a:txBody>
+                  <a:tcPr anchor="ctr">
+                    <a:lnL w="12700" cap="flat" cmpd="sng" algn="ctr">
+                      <a:solidFill>
+                        <a:schemeClr val="tx1"/>
+                      </a:solidFill>
+                      <a:prstDash val="solid"/>
+                      <a:round/>
+                      <a:headEnd type="none" w="med" len="med"/>
+                      <a:tailEnd type="none" w="med" len="med"/>
+                    </a:lnL>
+                    <a:lnR w="12700" cap="flat" cmpd="sng" algn="ctr">
+                      <a:solidFill>
+                        <a:schemeClr val="tx1"/>
+                      </a:solidFill>
+                      <a:prstDash val="solid"/>
+                      <a:round/>
+                      <a:headEnd type="none" w="med" len="med"/>
+                      <a:tailEnd type="none" w="med" len="med"/>
+                    </a:lnR>
+                    <a:lnT w="12700" cap="flat" cmpd="sng" algn="ctr">
+                      <a:solidFill>
+                        <a:schemeClr val="tx1"/>
+                      </a:solidFill>
+                      <a:prstDash val="solid"/>
+                      <a:round/>
+                      <a:headEnd type="none" w="med" len="med"/>
+                      <a:tailEnd type="none" w="med" len="med"/>
+                    </a:lnT>
+                    <a:lnB w="12700" cap="flat" cmpd="sng" algn="ctr">
+                      <a:solidFill>
+                        <a:schemeClr val="tx1"/>
+                      </a:solidFill>
+                      <a:prstDash val="solid"/>
+                      <a:round/>
+                      <a:headEnd type="none" w="med" len="med"/>
+                      <a:tailEnd type="none" w="med" len="med"/>
+                    </a:lnB>
+                    <a:noFill/>
+                  </a:tcPr>
+                </a:tc>
+                <a:tc>
+                  <a:txBody>
+                    <a:bodyPr/>
+                    <a:lstStyle/>
+                    <a:p>
+                      <a:pPr>
+                        <a:buNone/>
+                      </a:pPr>
+                      <a:r>
+                        <a:rPr lang="en-IN">
+                          <a:latin typeface="Times New Roman" panose="02020603050405020304" pitchFamily="18" charset="0"/>
+                          <a:cs typeface="Times New Roman" panose="02020603050405020304" pitchFamily="18" charset="0"/>
+                        </a:rPr>
+                        <a:t>Sick</a:t>
+                      </a:r>
+                    </a:p>
+                  </a:txBody>
+                  <a:tcPr anchor="ctr">
+                    <a:lnL w="12700" cap="flat" cmpd="sng" algn="ctr">
+                      <a:solidFill>
+                        <a:schemeClr val="tx1"/>
+                      </a:solidFill>
+                      <a:prstDash val="solid"/>
+                      <a:round/>
+                      <a:headEnd type="none" w="med" len="med"/>
+                      <a:tailEnd type="none" w="med" len="med"/>
+                    </a:lnL>
+                    <a:lnR w="12700" cap="flat" cmpd="sng" algn="ctr">
+                      <a:solidFill>
+                        <a:schemeClr val="tx1"/>
+                      </a:solidFill>
+                      <a:prstDash val="solid"/>
+                      <a:round/>
+                      <a:headEnd type="none" w="med" len="med"/>
+                      <a:tailEnd type="none" w="med" len="med"/>
+                    </a:lnR>
+                    <a:lnT w="12700" cap="flat" cmpd="sng" algn="ctr">
+                      <a:solidFill>
+                        <a:schemeClr val="tx1"/>
+                      </a:solidFill>
+                      <a:prstDash val="solid"/>
+                      <a:round/>
+                      <a:headEnd type="none" w="med" len="med"/>
+                      <a:tailEnd type="none" w="med" len="med"/>
+                    </a:lnT>
+                    <a:lnB w="12700" cap="flat" cmpd="sng" algn="ctr">
+                      <a:solidFill>
+                        <a:schemeClr val="tx1"/>
+                      </a:solidFill>
+                      <a:prstDash val="solid"/>
+                      <a:round/>
+                      <a:headEnd type="none" w="med" len="med"/>
+                      <a:tailEnd type="none" w="med" len="med"/>
+                    </a:lnB>
+                    <a:noFill/>
+                  </a:tcPr>
+                </a:tc>
+                <a:extLst>
+                  <a:ext uri="{0D108BD9-81ED-4DB2-BD59-A6C34878D82A}">
+                    <a16:rowId xmlns:a16="http://schemas.microsoft.com/office/drawing/2014/main" val="1136602396"/>
+                  </a:ext>
+                </a:extLst>
+              </a:tr>
+              <a:tr h="337084">
+                <a:tc>
+                  <a:txBody>
+                    <a:bodyPr/>
+                    <a:lstStyle/>
+                    <a:p>
+                      <a:pPr>
+                        <a:buNone/>
+                      </a:pPr>
+                      <a:r>
+                        <a:rPr lang="en-IN">
+                          <a:latin typeface="Times New Roman" panose="02020603050405020304" pitchFamily="18" charset="0"/>
+                          <a:cs typeface="Times New Roman" panose="02020603050405020304" pitchFamily="18" charset="0"/>
+                        </a:rPr>
+                        <a:t>7</a:t>
+                      </a:r>
+                    </a:p>
+                  </a:txBody>
+                  <a:tcPr anchor="ctr">
+                    <a:lnL w="12700" cap="flat" cmpd="sng" algn="ctr">
+                      <a:solidFill>
+                        <a:schemeClr val="tx1"/>
+                      </a:solidFill>
+                      <a:prstDash val="solid"/>
+                      <a:round/>
+                      <a:headEnd type="none" w="med" len="med"/>
+                      <a:tailEnd type="none" w="med" len="med"/>
+                    </a:lnL>
+                    <a:lnR w="12700" cap="flat" cmpd="sng" algn="ctr">
+                      <a:solidFill>
+                        <a:schemeClr val="tx1"/>
+                      </a:solidFill>
+                      <a:prstDash val="solid"/>
+                      <a:round/>
+                      <a:headEnd type="none" w="med" len="med"/>
+                      <a:tailEnd type="none" w="med" len="med"/>
+                    </a:lnR>
+                    <a:lnT w="12700" cap="flat" cmpd="sng" algn="ctr">
+                      <a:solidFill>
+                        <a:schemeClr val="tx1"/>
+                      </a:solidFill>
+                      <a:prstDash val="solid"/>
+                      <a:round/>
+                      <a:headEnd type="none" w="med" len="med"/>
+                      <a:tailEnd type="none" w="med" len="med"/>
+                    </a:lnT>
+                    <a:lnB w="12700" cap="flat" cmpd="sng" algn="ctr">
+                      <a:solidFill>
+                        <a:schemeClr val="tx1"/>
+                      </a:solidFill>
+                      <a:prstDash val="solid"/>
+                      <a:round/>
+                      <a:headEnd type="none" w="med" len="med"/>
+                      <a:tailEnd type="none" w="med" len="med"/>
+                    </a:lnB>
+                    <a:noFill/>
+                  </a:tcPr>
+                </a:tc>
+                <a:tc>
+                  <a:txBody>
+                    <a:bodyPr/>
+                    <a:lstStyle/>
+                    <a:p>
+                      <a:pPr>
+                        <a:buNone/>
+                      </a:pPr>
+                      <a:r>
+                        <a:rPr lang="en-IN">
+                          <a:latin typeface="Times New Roman" panose="02020603050405020304" pitchFamily="18" charset="0"/>
+                          <a:cs typeface="Times New Roman" panose="02020603050405020304" pitchFamily="18" charset="0"/>
+                        </a:rPr>
+                        <a:t>Healthy</a:t>
+                      </a:r>
+                    </a:p>
+                  </a:txBody>
+                  <a:tcPr anchor="ctr">
+                    <a:lnL w="12700" cap="flat" cmpd="sng" algn="ctr">
+                      <a:solidFill>
+                        <a:schemeClr val="tx1"/>
+                      </a:solidFill>
+                      <a:prstDash val="solid"/>
+                      <a:round/>
+                      <a:headEnd type="none" w="med" len="med"/>
+                      <a:tailEnd type="none" w="med" len="med"/>
+                    </a:lnL>
+                    <a:lnR w="12700" cap="flat" cmpd="sng" algn="ctr">
+                      <a:solidFill>
+                        <a:schemeClr val="tx1"/>
+                      </a:solidFill>
+                      <a:prstDash val="solid"/>
+                      <a:round/>
+                      <a:headEnd type="none" w="med" len="med"/>
+                      <a:tailEnd type="none" w="med" len="med"/>
+                    </a:lnR>
+                    <a:lnT w="12700" cap="flat" cmpd="sng" algn="ctr">
+                      <a:solidFill>
+                        <a:schemeClr val="tx1"/>
+                      </a:solidFill>
+                      <a:prstDash val="solid"/>
+                      <a:round/>
+                      <a:headEnd type="none" w="med" len="med"/>
+                      <a:tailEnd type="none" w="med" len="med"/>
+                    </a:lnT>
+                    <a:lnB w="12700" cap="flat" cmpd="sng" algn="ctr">
+                      <a:solidFill>
+                        <a:schemeClr val="tx1"/>
+                      </a:solidFill>
+                      <a:prstDash val="solid"/>
+                      <a:round/>
+                      <a:headEnd type="none" w="med" len="med"/>
+                      <a:tailEnd type="none" w="med" len="med"/>
+                    </a:lnB>
+                    <a:noFill/>
+                  </a:tcPr>
+                </a:tc>
+                <a:tc>
+                  <a:txBody>
+                    <a:bodyPr/>
+                    <a:lstStyle/>
+                    <a:p>
+                      <a:pPr>
+                        <a:buNone/>
+                      </a:pPr>
+                      <a:r>
+                        <a:rPr lang="en-IN">
+                          <a:latin typeface="Times New Roman" panose="02020603050405020304" pitchFamily="18" charset="0"/>
+                          <a:cs typeface="Times New Roman" panose="02020603050405020304" pitchFamily="18" charset="0"/>
+                        </a:rPr>
+                        <a:t>Healthy</a:t>
+                      </a:r>
+                    </a:p>
+                  </a:txBody>
+                  <a:tcPr anchor="ctr">
+                    <a:lnL w="12700" cap="flat" cmpd="sng" algn="ctr">
+                      <a:solidFill>
+                        <a:schemeClr val="tx1"/>
+                      </a:solidFill>
+                      <a:prstDash val="solid"/>
+                      <a:round/>
+                      <a:headEnd type="none" w="med" len="med"/>
+                      <a:tailEnd type="none" w="med" len="med"/>
+                    </a:lnL>
+                    <a:lnR w="12700" cap="flat" cmpd="sng" algn="ctr">
+                      <a:solidFill>
+                        <a:schemeClr val="tx1"/>
+                      </a:solidFill>
+                      <a:prstDash val="solid"/>
+                      <a:round/>
+                      <a:headEnd type="none" w="med" len="med"/>
+                      <a:tailEnd type="none" w="med" len="med"/>
+                    </a:lnR>
+                    <a:lnT w="12700" cap="flat" cmpd="sng" algn="ctr">
+                      <a:solidFill>
+                        <a:schemeClr val="tx1"/>
+                      </a:solidFill>
+                      <a:prstDash val="solid"/>
+                      <a:round/>
+                      <a:headEnd type="none" w="med" len="med"/>
+                      <a:tailEnd type="none" w="med" len="med"/>
+                    </a:lnT>
+                    <a:lnB w="12700" cap="flat" cmpd="sng" algn="ctr">
+                      <a:solidFill>
+                        <a:schemeClr val="tx1"/>
+                      </a:solidFill>
+                      <a:prstDash val="solid"/>
+                      <a:round/>
+                      <a:headEnd type="none" w="med" len="med"/>
+                      <a:tailEnd type="none" w="med" len="med"/>
+                    </a:lnB>
+                    <a:noFill/>
+                  </a:tcPr>
+                </a:tc>
+                <a:extLst>
+                  <a:ext uri="{0D108BD9-81ED-4DB2-BD59-A6C34878D82A}">
+                    <a16:rowId xmlns:a16="http://schemas.microsoft.com/office/drawing/2014/main" val="1297304044"/>
+                  </a:ext>
+                </a:extLst>
+              </a:tr>
+              <a:tr h="337084">
+                <a:tc>
+                  <a:txBody>
+                    <a:bodyPr/>
+                    <a:lstStyle/>
+                    <a:p>
+                      <a:pPr>
+                        <a:buNone/>
+                      </a:pPr>
+                      <a:r>
+                        <a:rPr lang="en-IN">
+                          <a:latin typeface="Times New Roman" panose="02020603050405020304" pitchFamily="18" charset="0"/>
+                          <a:cs typeface="Times New Roman" panose="02020603050405020304" pitchFamily="18" charset="0"/>
+                        </a:rPr>
+                        <a:t>8</a:t>
+                      </a:r>
+                    </a:p>
+                  </a:txBody>
+                  <a:tcPr anchor="ctr">
+                    <a:lnL w="12700" cap="flat" cmpd="sng" algn="ctr">
+                      <a:solidFill>
+                        <a:schemeClr val="tx1"/>
+                      </a:solidFill>
+                      <a:prstDash val="solid"/>
+                      <a:round/>
+                      <a:headEnd type="none" w="med" len="med"/>
+                      <a:tailEnd type="none" w="med" len="med"/>
+                    </a:lnL>
+                    <a:lnR w="12700" cap="flat" cmpd="sng" algn="ctr">
+                      <a:solidFill>
+                        <a:schemeClr val="tx1"/>
+                      </a:solidFill>
+                      <a:prstDash val="solid"/>
+                      <a:round/>
+                      <a:headEnd type="none" w="med" len="med"/>
+                      <a:tailEnd type="none" w="med" len="med"/>
+                    </a:lnR>
+                    <a:lnT w="12700" cap="flat" cmpd="sng" algn="ctr">
+                      <a:solidFill>
+                        <a:schemeClr val="tx1"/>
+                      </a:solidFill>
+                      <a:prstDash val="solid"/>
+                      <a:round/>
+                      <a:headEnd type="none" w="med" len="med"/>
+                      <a:tailEnd type="none" w="med" len="med"/>
+                    </a:lnT>
+                    <a:lnB w="12700" cap="flat" cmpd="sng" algn="ctr">
+                      <a:solidFill>
+                        <a:schemeClr val="tx1"/>
+                      </a:solidFill>
+                      <a:prstDash val="solid"/>
+                      <a:round/>
+                      <a:headEnd type="none" w="med" len="med"/>
+                      <a:tailEnd type="none" w="med" len="med"/>
+                    </a:lnB>
+                    <a:noFill/>
+                  </a:tcPr>
+                </a:tc>
+                <a:tc>
+                  <a:txBody>
+                    <a:bodyPr/>
+                    <a:lstStyle/>
+                    <a:p>
+                      <a:pPr>
+                        <a:buNone/>
+                      </a:pPr>
+                      <a:r>
+                        <a:rPr lang="en-IN">
+                          <a:latin typeface="Times New Roman" panose="02020603050405020304" pitchFamily="18" charset="0"/>
+                          <a:cs typeface="Times New Roman" panose="02020603050405020304" pitchFamily="18" charset="0"/>
+                        </a:rPr>
+                        <a:t>Healthy</a:t>
+                      </a:r>
+                    </a:p>
+                  </a:txBody>
+                  <a:tcPr anchor="ctr">
+                    <a:lnL w="12700" cap="flat" cmpd="sng" algn="ctr">
+                      <a:solidFill>
+                        <a:schemeClr val="tx1"/>
+                      </a:solidFill>
+                      <a:prstDash val="solid"/>
+                      <a:round/>
+                      <a:headEnd type="none" w="med" len="med"/>
+                      <a:tailEnd type="none" w="med" len="med"/>
+                    </a:lnL>
+                    <a:lnR w="12700" cap="flat" cmpd="sng" algn="ctr">
+                      <a:solidFill>
+                        <a:schemeClr val="tx1"/>
+                      </a:solidFill>
+                      <a:prstDash val="solid"/>
+                      <a:round/>
+                      <a:headEnd type="none" w="med" len="med"/>
+                      <a:tailEnd type="none" w="med" len="med"/>
+                    </a:lnR>
+                    <a:lnT w="12700" cap="flat" cmpd="sng" algn="ctr">
+                      <a:solidFill>
+                        <a:schemeClr val="tx1"/>
+                      </a:solidFill>
+                      <a:prstDash val="solid"/>
+                      <a:round/>
+                      <a:headEnd type="none" w="med" len="med"/>
+                      <a:tailEnd type="none" w="med" len="med"/>
+                    </a:lnT>
+                    <a:lnB w="12700" cap="flat" cmpd="sng" algn="ctr">
+                      <a:solidFill>
+                        <a:schemeClr val="tx1"/>
+                      </a:solidFill>
+                      <a:prstDash val="solid"/>
+                      <a:round/>
+                      <a:headEnd type="none" w="med" len="med"/>
+                      <a:tailEnd type="none" w="med" len="med"/>
+                    </a:lnB>
+                    <a:noFill/>
+                  </a:tcPr>
+                </a:tc>
+                <a:tc>
+                  <a:txBody>
+                    <a:bodyPr/>
+                    <a:lstStyle/>
+                    <a:p>
+                      <a:pPr>
+                        <a:buNone/>
+                      </a:pPr>
+                      <a:r>
+                        <a:rPr lang="en-IN">
+                          <a:latin typeface="Times New Roman" panose="02020603050405020304" pitchFamily="18" charset="0"/>
+                          <a:cs typeface="Times New Roman" panose="02020603050405020304" pitchFamily="18" charset="0"/>
+                        </a:rPr>
+                        <a:t>Healthy</a:t>
+                      </a:r>
+                    </a:p>
+                  </a:txBody>
+                  <a:tcPr anchor="ctr">
+                    <a:lnL w="12700" cap="flat" cmpd="sng" algn="ctr">
+                      <a:solidFill>
+                        <a:schemeClr val="tx1"/>
+                      </a:solidFill>
+                      <a:prstDash val="solid"/>
+                      <a:round/>
+                      <a:headEnd type="none" w="med" len="med"/>
+                      <a:tailEnd type="none" w="med" len="med"/>
+                    </a:lnL>
+                    <a:lnR w="12700" cap="flat" cmpd="sng" algn="ctr">
+                      <a:solidFill>
+                        <a:schemeClr val="tx1"/>
+                      </a:solidFill>
+                      <a:prstDash val="solid"/>
+                      <a:round/>
+                      <a:headEnd type="none" w="med" len="med"/>
+                      <a:tailEnd type="none" w="med" len="med"/>
+                    </a:lnR>
+                    <a:lnT w="12700" cap="flat" cmpd="sng" algn="ctr">
+                      <a:solidFill>
+                        <a:schemeClr val="tx1"/>
+                      </a:solidFill>
+                      <a:prstDash val="solid"/>
+                      <a:round/>
+                      <a:headEnd type="none" w="med" len="med"/>
+                      <a:tailEnd type="none" w="med" len="med"/>
+                    </a:lnT>
+                    <a:lnB w="12700" cap="flat" cmpd="sng" algn="ctr">
+                      <a:solidFill>
+                        <a:schemeClr val="tx1"/>
+                      </a:solidFill>
+                      <a:prstDash val="solid"/>
+                      <a:round/>
+                      <a:headEnd type="none" w="med" len="med"/>
+                      <a:tailEnd type="none" w="med" len="med"/>
+                    </a:lnB>
+                    <a:noFill/>
+                  </a:tcPr>
+                </a:tc>
+                <a:extLst>
+                  <a:ext uri="{0D108BD9-81ED-4DB2-BD59-A6C34878D82A}">
+                    <a16:rowId xmlns:a16="http://schemas.microsoft.com/office/drawing/2014/main" val="3880719146"/>
+                  </a:ext>
+                </a:extLst>
+              </a:tr>
+              <a:tr h="337084">
+                <a:tc>
+                  <a:txBody>
+                    <a:bodyPr/>
+                    <a:lstStyle/>
+                    <a:p>
+                      <a:pPr>
+                        <a:buNone/>
+                      </a:pPr>
+                      <a:r>
+                        <a:rPr lang="en-IN">
+                          <a:latin typeface="Times New Roman" panose="02020603050405020304" pitchFamily="18" charset="0"/>
+                          <a:cs typeface="Times New Roman" panose="02020603050405020304" pitchFamily="18" charset="0"/>
+                        </a:rPr>
+                        <a:t>9</a:t>
+                      </a:r>
+                    </a:p>
+                  </a:txBody>
+                  <a:tcPr anchor="ctr">
+                    <a:lnL w="12700" cap="flat" cmpd="sng" algn="ctr">
+                      <a:solidFill>
+                        <a:schemeClr val="tx1"/>
+                      </a:solidFill>
+                      <a:prstDash val="solid"/>
+                      <a:round/>
+                      <a:headEnd type="none" w="med" len="med"/>
+                      <a:tailEnd type="none" w="med" len="med"/>
+                    </a:lnL>
+                    <a:lnR w="12700" cap="flat" cmpd="sng" algn="ctr">
+                      <a:solidFill>
+                        <a:schemeClr val="tx1"/>
+                      </a:solidFill>
+                      <a:prstDash val="solid"/>
+                      <a:round/>
+                      <a:headEnd type="none" w="med" len="med"/>
+                      <a:tailEnd type="none" w="med" len="med"/>
+                    </a:lnR>
+                    <a:lnT w="12700" cap="flat" cmpd="sng" algn="ctr">
+                      <a:solidFill>
+                        <a:schemeClr val="tx1"/>
+                      </a:solidFill>
+                      <a:prstDash val="solid"/>
+                      <a:round/>
+                      <a:headEnd type="none" w="med" len="med"/>
+                      <a:tailEnd type="none" w="med" len="med"/>
+                    </a:lnT>
+                    <a:lnB w="12700" cap="flat" cmpd="sng" algn="ctr">
+                      <a:solidFill>
+                        <a:schemeClr val="tx1"/>
+                      </a:solidFill>
+                      <a:prstDash val="solid"/>
+                      <a:round/>
+                      <a:headEnd type="none" w="med" len="med"/>
+                      <a:tailEnd type="none" w="med" len="med"/>
+                    </a:lnB>
+                    <a:noFill/>
+                  </a:tcPr>
+                </a:tc>
+                <a:tc>
+                  <a:txBody>
+                    <a:bodyPr/>
+                    <a:lstStyle/>
+                    <a:p>
+                      <a:pPr>
+                        <a:buNone/>
+                      </a:pPr>
+                      <a:r>
+                        <a:rPr lang="en-IN">
+                          <a:latin typeface="Times New Roman" panose="02020603050405020304" pitchFamily="18" charset="0"/>
+                          <a:cs typeface="Times New Roman" panose="02020603050405020304" pitchFamily="18" charset="0"/>
+                        </a:rPr>
+                        <a:t>Sick</a:t>
+                      </a:r>
+                    </a:p>
+                  </a:txBody>
+                  <a:tcPr anchor="ctr">
+                    <a:lnL w="12700" cap="flat" cmpd="sng" algn="ctr">
+                      <a:solidFill>
+                        <a:schemeClr val="tx1"/>
+                      </a:solidFill>
+                      <a:prstDash val="solid"/>
+                      <a:round/>
+                      <a:headEnd type="none" w="med" len="med"/>
+                      <a:tailEnd type="none" w="med" len="med"/>
+                    </a:lnL>
+                    <a:lnR w="12700" cap="flat" cmpd="sng" algn="ctr">
+                      <a:solidFill>
+                        <a:schemeClr val="tx1"/>
+                      </a:solidFill>
+                      <a:prstDash val="solid"/>
+                      <a:round/>
+                      <a:headEnd type="none" w="med" len="med"/>
+                      <a:tailEnd type="none" w="med" len="med"/>
+                    </a:lnR>
+                    <a:lnT w="12700" cap="flat" cmpd="sng" algn="ctr">
+                      <a:solidFill>
+                        <a:schemeClr val="tx1"/>
+                      </a:solidFill>
+                      <a:prstDash val="solid"/>
+                      <a:round/>
+                      <a:headEnd type="none" w="med" len="med"/>
+                      <a:tailEnd type="none" w="med" len="med"/>
+                    </a:lnT>
+                    <a:lnB w="12700" cap="flat" cmpd="sng" algn="ctr">
+                      <a:solidFill>
+                        <a:schemeClr val="tx1"/>
+                      </a:solidFill>
+                      <a:prstDash val="solid"/>
+                      <a:round/>
+                      <a:headEnd type="none" w="med" len="med"/>
+                      <a:tailEnd type="none" w="med" len="med"/>
+                    </a:lnB>
+                    <a:noFill/>
+                  </a:tcPr>
+                </a:tc>
+                <a:tc>
+                  <a:txBody>
+                    <a:bodyPr/>
+                    <a:lstStyle/>
+                    <a:p>
+                      <a:pPr>
+                        <a:buNone/>
+                      </a:pPr>
+                      <a:r>
+                        <a:rPr lang="en-IN">
+                          <a:latin typeface="Times New Roman" panose="02020603050405020304" pitchFamily="18" charset="0"/>
+                          <a:cs typeface="Times New Roman" panose="02020603050405020304" pitchFamily="18" charset="0"/>
+                        </a:rPr>
+                        <a:t>Healthy</a:t>
+                      </a:r>
+                    </a:p>
+                  </a:txBody>
+                  <a:tcPr anchor="ctr">
+                    <a:lnL w="12700" cap="flat" cmpd="sng" algn="ctr">
+                      <a:solidFill>
+                        <a:schemeClr val="tx1"/>
+                      </a:solidFill>
+                      <a:prstDash val="solid"/>
+                      <a:round/>
+                      <a:headEnd type="none" w="med" len="med"/>
+                      <a:tailEnd type="none" w="med" len="med"/>
+                    </a:lnL>
+                    <a:lnR w="12700" cap="flat" cmpd="sng" algn="ctr">
+                      <a:solidFill>
+                        <a:schemeClr val="tx1"/>
+                      </a:solidFill>
+                      <a:prstDash val="solid"/>
+                      <a:round/>
+                      <a:headEnd type="none" w="med" len="med"/>
+                      <a:tailEnd type="none" w="med" len="med"/>
+                    </a:lnR>
+                    <a:lnT w="12700" cap="flat" cmpd="sng" algn="ctr">
+                      <a:solidFill>
+                        <a:schemeClr val="tx1"/>
+                      </a:solidFill>
+                      <a:prstDash val="solid"/>
+                      <a:round/>
+                      <a:headEnd type="none" w="med" len="med"/>
+                      <a:tailEnd type="none" w="med" len="med"/>
+                    </a:lnT>
+                    <a:lnB w="12700" cap="flat" cmpd="sng" algn="ctr">
+                      <a:solidFill>
+                        <a:schemeClr val="tx1"/>
+                      </a:solidFill>
+                      <a:prstDash val="solid"/>
+                      <a:round/>
+                      <a:headEnd type="none" w="med" len="med"/>
+                      <a:tailEnd type="none" w="med" len="med"/>
+                    </a:lnB>
+                    <a:noFill/>
+                  </a:tcPr>
+                </a:tc>
+                <a:extLst>
+                  <a:ext uri="{0D108BD9-81ED-4DB2-BD59-A6C34878D82A}">
+                    <a16:rowId xmlns:a16="http://schemas.microsoft.com/office/drawing/2014/main" val="1700767701"/>
+                  </a:ext>
+                </a:extLst>
+              </a:tr>
+              <a:tr h="337084">
+                <a:tc>
+                  <a:txBody>
+                    <a:bodyPr/>
+                    <a:lstStyle/>
+                    <a:p>
+                      <a:pPr>
+                        <a:buNone/>
+                      </a:pPr>
+                      <a:r>
+                        <a:rPr lang="en-IN">
+                          <a:latin typeface="Times New Roman" panose="02020603050405020304" pitchFamily="18" charset="0"/>
+                          <a:cs typeface="Times New Roman" panose="02020603050405020304" pitchFamily="18" charset="0"/>
+                        </a:rPr>
+                        <a:t>10</a:t>
+                      </a:r>
+                    </a:p>
+                  </a:txBody>
+                  <a:tcPr anchor="ctr">
+                    <a:lnL w="12700" cap="flat" cmpd="sng" algn="ctr">
+                      <a:solidFill>
+                        <a:schemeClr val="tx1"/>
+                      </a:solidFill>
+                      <a:prstDash val="solid"/>
+                      <a:round/>
+                      <a:headEnd type="none" w="med" len="med"/>
+                      <a:tailEnd type="none" w="med" len="med"/>
+                    </a:lnL>
+                    <a:lnR w="12700" cap="flat" cmpd="sng" algn="ctr">
+                      <a:solidFill>
+                        <a:schemeClr val="tx1"/>
+                      </a:solidFill>
+                      <a:prstDash val="solid"/>
+                      <a:round/>
+                      <a:headEnd type="none" w="med" len="med"/>
+                      <a:tailEnd type="none" w="med" len="med"/>
+                    </a:lnR>
+                    <a:lnT w="12700" cap="flat" cmpd="sng" algn="ctr">
+                      <a:solidFill>
+                        <a:schemeClr val="tx1"/>
+                      </a:solidFill>
+                      <a:prstDash val="solid"/>
+                      <a:round/>
+                      <a:headEnd type="none" w="med" len="med"/>
+                      <a:tailEnd type="none" w="med" len="med"/>
+                    </a:lnT>
+                    <a:lnB w="12700" cap="flat" cmpd="sng" algn="ctr">
+                      <a:solidFill>
+                        <a:schemeClr val="tx1"/>
+                      </a:solidFill>
+                      <a:prstDash val="solid"/>
+                      <a:round/>
+                      <a:headEnd type="none" w="med" len="med"/>
+                      <a:tailEnd type="none" w="med" len="med"/>
+                    </a:lnB>
+                    <a:noFill/>
+                  </a:tcPr>
+                </a:tc>
+                <a:tc>
+                  <a:txBody>
+                    <a:bodyPr/>
+                    <a:lstStyle/>
+                    <a:p>
+                      <a:pPr>
+                        <a:buNone/>
+                      </a:pPr>
+                      <a:r>
+                        <a:rPr lang="en-IN">
+                          <a:latin typeface="Times New Roman" panose="02020603050405020304" pitchFamily="18" charset="0"/>
+                          <a:cs typeface="Times New Roman" panose="02020603050405020304" pitchFamily="18" charset="0"/>
+                        </a:rPr>
+                        <a:t>Healthy</a:t>
+                      </a:r>
+                    </a:p>
+                  </a:txBody>
+                  <a:tcPr anchor="ctr">
+                    <a:lnL w="12700" cap="flat" cmpd="sng" algn="ctr">
+                      <a:solidFill>
+                        <a:schemeClr val="tx1"/>
+                      </a:solidFill>
+                      <a:prstDash val="solid"/>
+                      <a:round/>
+                      <a:headEnd type="none" w="med" len="med"/>
+                      <a:tailEnd type="none" w="med" len="med"/>
+                    </a:lnL>
+                    <a:lnR w="12700" cap="flat" cmpd="sng" algn="ctr">
+                      <a:solidFill>
+                        <a:schemeClr val="tx1"/>
+                      </a:solidFill>
+                      <a:prstDash val="solid"/>
+                      <a:round/>
+                      <a:headEnd type="none" w="med" len="med"/>
+                      <a:tailEnd type="none" w="med" len="med"/>
+                    </a:lnR>
+                    <a:lnT w="12700" cap="flat" cmpd="sng" algn="ctr">
+                      <a:solidFill>
+                        <a:schemeClr val="tx1"/>
+                      </a:solidFill>
+                      <a:prstDash val="solid"/>
+                      <a:round/>
+                      <a:headEnd type="none" w="med" len="med"/>
+                      <a:tailEnd type="none" w="med" len="med"/>
+                    </a:lnT>
+                    <a:lnB w="12700" cap="flat" cmpd="sng" algn="ctr">
+                      <a:solidFill>
+                        <a:schemeClr val="tx1"/>
+                      </a:solidFill>
+                      <a:prstDash val="solid"/>
+                      <a:round/>
+                      <a:headEnd type="none" w="med" len="med"/>
+                      <a:tailEnd type="none" w="med" len="med"/>
+                    </a:lnB>
+                    <a:noFill/>
+                  </a:tcPr>
+                </a:tc>
+                <a:tc>
+                  <a:txBody>
+                    <a:bodyPr/>
+                    <a:lstStyle/>
+                    <a:p>
+                      <a:pPr>
+                        <a:buNone/>
+                      </a:pPr>
+                      <a:r>
+                        <a:rPr lang="en-IN" dirty="0">
+                          <a:latin typeface="Times New Roman" panose="02020603050405020304" pitchFamily="18" charset="0"/>
+                          <a:cs typeface="Times New Roman" panose="02020603050405020304" pitchFamily="18" charset="0"/>
+                        </a:rPr>
+                        <a:t>Sick</a:t>
+                      </a:r>
+                    </a:p>
+                  </a:txBody>
+                  <a:tcPr anchor="ctr">
+                    <a:lnL w="12700" cap="flat" cmpd="sng" algn="ctr">
+                      <a:solidFill>
+                        <a:schemeClr val="tx1"/>
+                      </a:solidFill>
+                      <a:prstDash val="solid"/>
+                      <a:round/>
+                      <a:headEnd type="none" w="med" len="med"/>
+                      <a:tailEnd type="none" w="med" len="med"/>
+                    </a:lnL>
+                    <a:lnR w="12700" cap="flat" cmpd="sng" algn="ctr">
+                      <a:solidFill>
+                        <a:schemeClr val="tx1"/>
+                      </a:solidFill>
+                      <a:prstDash val="solid"/>
+                      <a:round/>
+                      <a:headEnd type="none" w="med" len="med"/>
+                      <a:tailEnd type="none" w="med" len="med"/>
+                    </a:lnR>
+                    <a:lnT w="12700" cap="flat" cmpd="sng" algn="ctr">
+                      <a:solidFill>
+                        <a:schemeClr val="tx1"/>
+                      </a:solidFill>
+                      <a:prstDash val="solid"/>
+                      <a:round/>
+                      <a:headEnd type="none" w="med" len="med"/>
+                      <a:tailEnd type="none" w="med" len="med"/>
+                    </a:lnT>
+                    <a:lnB w="12700" cap="flat" cmpd="sng" algn="ctr">
+                      <a:solidFill>
+                        <a:schemeClr val="tx1"/>
+                      </a:solidFill>
+                      <a:prstDash val="solid"/>
+                      <a:round/>
+                      <a:headEnd type="none" w="med" len="med"/>
+                      <a:tailEnd type="none" w="med" len="med"/>
+                    </a:lnB>
+                    <a:noFill/>
+                  </a:tcPr>
+                </a:tc>
+                <a:extLst>
+                  <a:ext uri="{0D108BD9-81ED-4DB2-BD59-A6C34878D82A}">
+                    <a16:rowId xmlns:a16="http://schemas.microsoft.com/office/drawing/2014/main" val="3260887742"/>
+                  </a:ext>
+                </a:extLst>
+              </a:tr>
+            </a:tbl>
+          </a:graphicData>
+        </a:graphic>
+      </p:graphicFrame>
+      <p:sp>
+        <p:nvSpPr>
+          <p:cNvPr id="5" name="TextBox 4">
+            <a:extLst>
+              <a:ext uri="{FF2B5EF4-FFF2-40B4-BE49-F238E27FC236}">
+                <a16:creationId xmlns:a16="http://schemas.microsoft.com/office/drawing/2014/main" id="{BB1428E0-7E9C-E9F5-1D85-A72CD499D0AF}"/>
+              </a:ext>
+            </a:extLst>
+          </p:cNvPr>
+          <p:cNvSpPr txBox="1"/>
+          <p:nvPr/>
+        </p:nvSpPr>
+        <p:spPr>
+          <a:xfrm>
+            <a:off x="5295901" y="2037239"/>
+            <a:ext cx="2752724" cy="830997"/>
+          </a:xfrm>
+          <a:prstGeom prst="rect">
+            <a:avLst/>
+          </a:prstGeom>
+          <a:noFill/>
+        </p:spPr>
+        <p:txBody>
+          <a:bodyPr wrap="square" rtlCol="0">
+            <a:spAutoFit/>
+          </a:bodyPr>
+          <a:lstStyle/>
+          <a:p>
+            <a:r>
+              <a:rPr lang="en-IN" sz="2400" dirty="0">
+                <a:solidFill>
+                  <a:srgbClr val="0070C0"/>
+                </a:solidFill>
+                <a:latin typeface="Times New Roman" panose="02020603050405020304" pitchFamily="18" charset="0"/>
+                <a:cs typeface="Times New Roman" panose="02020603050405020304" pitchFamily="18" charset="0"/>
+              </a:rPr>
+              <a:t>TP = 3    TN = 3</a:t>
+            </a:r>
+          </a:p>
+          <a:p>
+            <a:r>
+              <a:rPr lang="en-IN" sz="2400" dirty="0">
+                <a:solidFill>
+                  <a:srgbClr val="0070C0"/>
+                </a:solidFill>
+                <a:latin typeface="Times New Roman" panose="02020603050405020304" pitchFamily="18" charset="0"/>
+                <a:cs typeface="Times New Roman" panose="02020603050405020304" pitchFamily="18" charset="0"/>
+              </a:rPr>
+              <a:t>FP = 2    FN = 2</a:t>
+            </a:r>
+          </a:p>
+        </p:txBody>
+      </p:sp>
+      <mc:AlternateContent xmlns:mc="http://schemas.openxmlformats.org/markup-compatibility/2006">
+        <mc:Choice xmlns:a14="http://schemas.microsoft.com/office/drawing/2010/main" Requires="a14">
           <p:sp>
             <p:nvSpPr>
-              <p:cNvPr id="3" name="Content Placeholder 2">
+              <p:cNvPr id="8" name="TextBox 7">
                 <a:extLst>
                   <a:ext uri="{FF2B5EF4-FFF2-40B4-BE49-F238E27FC236}">
-                    <a16:creationId xmlns:a16="http://schemas.microsoft.com/office/drawing/2014/main" id="{EB622653-DDA4-0B42-C2FA-90EB6523B0CE}"/>
+                    <a16:creationId xmlns:a16="http://schemas.microsoft.com/office/drawing/2014/main" id="{6DD6B8FE-8987-EF1C-D926-06058DA29067}"/>
                   </a:ext>
                 </a:extLst>
               </p:cNvPr>
-              <p:cNvSpPr>
-                <a:spLocks noGrp="1"/>
-              </p:cNvSpPr>
-              <p:nvPr>
-                <p:ph idx="1"/>
-              </p:nvPr>
+              <p:cNvSpPr txBox="1"/>
+              <p:nvPr/>
             </p:nvSpPr>
             <p:spPr>
               <a:xfrm>
-                <a:off x="838200" y="1247776"/>
-                <a:ext cx="10515600" cy="5248274"/>
+                <a:off x="6000750" y="3214787"/>
+                <a:ext cx="4095750" cy="712759"/>
               </a:xfrm>
+              <a:prstGeom prst="rect">
+                <a:avLst/>
+              </a:prstGeom>
+              <a:noFill/>
             </p:spPr>
             <p:txBody>
-              <a:bodyPr>
-                <a:normAutofit/>
+              <a:bodyPr wrap="square">
+                <a:spAutoFit/>
               </a:bodyPr>
               <a:lstStyle/>
               <a:p>
-                <a:pPr marL="0" indent="0" algn="just">
-                  <a:buNone/>
-                </a:pPr>
+                <a:pPr algn="just"/>
                 <a:r>
-                  <a:rPr lang="en-IN" sz="2400" b="1" dirty="0">
+                  <a:rPr lang="en-IN" sz="2400" dirty="0">
                     <a:latin typeface="Times New Roman" panose="02020603050405020304" pitchFamily="18" charset="0"/>
                     <a:cs typeface="Times New Roman" panose="02020603050405020304" pitchFamily="18" charset="0"/>
                   </a:rPr>
-                  <a:t>ROC curve</a:t>
-                </a:r>
-              </a:p>
-              <a:p>
-                <a:pPr marL="0" indent="0" algn="just">
-                  <a:buNone/>
-                </a:pPr>
-                <a:r>
-                  <a:rPr lang="en-IN" sz="2400" i="1" dirty="0">
-                    <a:latin typeface="Times New Roman" panose="02020603050405020304" pitchFamily="18" charset="0"/>
-                    <a:cs typeface="Times New Roman" panose="02020603050405020304" pitchFamily="18" charset="0"/>
-                  </a:rPr>
-                  <a:t>X-axis (False Positive Rate, FPR) = </a:t>
+                  <a:t>TPR = </a:t>
                 </a:r>
                 <a14:m>
                   <m:oMath xmlns:m="http://schemas.openxmlformats.org/officeDocument/2006/math">
                     <m:f>
                       <m:fPr>
                         <m:ctrlPr>
-                          <a:rPr lang="en-IN" sz="2400" i="1" smtClean="0">
+                          <a:rPr lang="en-IN" sz="2800" i="1">
                             <a:latin typeface="Cambria Math" panose="02040503050406030204" pitchFamily="18" charset="0"/>
+                            <a:cs typeface="Times New Roman" panose="02020603050405020304" pitchFamily="18" charset="0"/>
                           </a:rPr>
                         </m:ctrlPr>
                       </m:fPr>
                       <m:num>
                         <m:r>
-                          <a:rPr lang="en-IN" sz="2400" b="0" i="1" smtClean="0">
+                          <m:rPr>
+                            <m:sty m:val="p"/>
+                          </m:rPr>
+                          <a:rPr lang="en-IN" sz="2800" b="0" i="0" smtClean="0">
                             <a:latin typeface="Cambria Math" panose="02040503050406030204" pitchFamily="18" charset="0"/>
+                            <a:cs typeface="Times New Roman" panose="02020603050405020304" pitchFamily="18" charset="0"/>
                           </a:rPr>
-                          <m:t>𝐹𝑃</m:t>
+                          <m:t>TP</m:t>
                         </m:r>
                       </m:num>
                       <m:den>
                         <m:r>
-                          <a:rPr lang="en-IN" sz="2400" b="0" i="1" smtClean="0">
+                          <m:rPr>
+                            <m:sty m:val="p"/>
+                          </m:rPr>
+                          <a:rPr lang="en-IN" sz="2800" b="0" i="0" smtClean="0">
                             <a:latin typeface="Cambria Math" panose="02040503050406030204" pitchFamily="18" charset="0"/>
+                            <a:cs typeface="Times New Roman" panose="02020603050405020304" pitchFamily="18" charset="0"/>
                           </a:rPr>
-                          <m:t>𝐹𝑃</m:t>
+                          <m:t>TP</m:t>
                         </m:r>
                         <m:r>
-                          <a:rPr lang="en-IN" sz="2400" b="0" i="1" smtClean="0">
+                          <a:rPr lang="en-IN" sz="2800">
                             <a:latin typeface="Cambria Math" panose="02040503050406030204" pitchFamily="18" charset="0"/>
+                            <a:cs typeface="Times New Roman" panose="02020603050405020304" pitchFamily="18" charset="0"/>
                           </a:rPr>
                           <m:t>+</m:t>
                         </m:r>
                         <m:r>
-                          <a:rPr lang="en-IN" sz="2400" b="0" i="1" smtClean="0">
+                          <a:rPr lang="en-IN" sz="2800" b="0" i="1" smtClean="0">
                             <a:latin typeface="Cambria Math" panose="02040503050406030204" pitchFamily="18" charset="0"/>
+                            <a:cs typeface="Times New Roman" panose="02020603050405020304" pitchFamily="18" charset="0"/>
                           </a:rPr>
-                          <m:t>𝑇𝑁</m:t>
+                          <m:t>𝐹𝑁</m:t>
                         </m:r>
                       </m:den>
                     </m:f>
+                    <m:r>
+                      <a:rPr lang="en-IN" sz="2800" b="0" i="1" smtClean="0">
+                        <a:latin typeface="Cambria Math" panose="02040503050406030204" pitchFamily="18" charset="0"/>
+                        <a:cs typeface="Times New Roman" panose="02020603050405020304" pitchFamily="18" charset="0"/>
+                      </a:rPr>
+                      <m:t>=</m:t>
+                    </m:r>
+                    <m:f>
+                      <m:fPr>
+                        <m:ctrlPr>
+                          <a:rPr lang="en-IN" sz="2800" i="1">
+                            <a:latin typeface="Cambria Math" panose="02040503050406030204" pitchFamily="18" charset="0"/>
+                            <a:cs typeface="Times New Roman" panose="02020603050405020304" pitchFamily="18" charset="0"/>
+                          </a:rPr>
+                        </m:ctrlPr>
+                      </m:fPr>
+                      <m:num>
+                        <m:r>
+                          <a:rPr lang="en-IN" sz="2800" b="0" i="0" smtClean="0">
+                            <a:latin typeface="Cambria Math" panose="02040503050406030204" pitchFamily="18" charset="0"/>
+                            <a:cs typeface="Times New Roman" panose="02020603050405020304" pitchFamily="18" charset="0"/>
+                          </a:rPr>
+                          <m:t>3</m:t>
+                        </m:r>
+                      </m:num>
+                      <m:den>
+                        <m:r>
+                          <a:rPr lang="en-IN" sz="2800" b="0" i="0" smtClean="0">
+                            <a:latin typeface="Cambria Math" panose="02040503050406030204" pitchFamily="18" charset="0"/>
+                            <a:cs typeface="Times New Roman" panose="02020603050405020304" pitchFamily="18" charset="0"/>
+                          </a:rPr>
+                          <m:t>3</m:t>
+                        </m:r>
+                        <m:r>
+                          <a:rPr lang="en-IN" sz="2800">
+                            <a:latin typeface="Cambria Math" panose="02040503050406030204" pitchFamily="18" charset="0"/>
+                            <a:cs typeface="Times New Roman" panose="02020603050405020304" pitchFamily="18" charset="0"/>
+                          </a:rPr>
+                          <m:t>+</m:t>
+                        </m:r>
+                        <m:r>
+                          <a:rPr lang="en-IN" sz="2800" b="0" i="1" smtClean="0">
+                            <a:latin typeface="Cambria Math" panose="02040503050406030204" pitchFamily="18" charset="0"/>
+                            <a:cs typeface="Times New Roman" panose="02020603050405020304" pitchFamily="18" charset="0"/>
+                          </a:rPr>
+                          <m:t>2</m:t>
+                        </m:r>
+                      </m:den>
+                    </m:f>
+                    <m:r>
+                      <a:rPr lang="en-IN" sz="2800">
+                        <a:latin typeface="Cambria Math" panose="02040503050406030204" pitchFamily="18" charset="0"/>
+                        <a:cs typeface="Times New Roman" panose="02020603050405020304" pitchFamily="18" charset="0"/>
+                      </a:rPr>
+                      <m:t>=0.</m:t>
+                    </m:r>
+                    <m:r>
+                      <a:rPr lang="en-IN" sz="2800" b="0" i="0" smtClean="0">
+                        <a:latin typeface="Cambria Math" panose="02040503050406030204" pitchFamily="18" charset="0"/>
+                        <a:cs typeface="Times New Roman" panose="02020603050405020304" pitchFamily="18" charset="0"/>
+                      </a:rPr>
+                      <m:t>6</m:t>
+                    </m:r>
                   </m:oMath>
                 </a14:m>
-                <a:endParaRPr lang="en-IN" sz="2400" b="0" i="1" dirty="0">
+                <a:endParaRPr lang="en-IN" sz="2400" dirty="0">
                   <a:latin typeface="Times New Roman" panose="02020603050405020304" pitchFamily="18" charset="0"/>
+                  <a:cs typeface="Times New Roman" panose="02020603050405020304" pitchFamily="18" charset="0"/>
                 </a:endParaRPr>
               </a:p>
+            </p:txBody>
+          </p:sp>
+        </mc:Choice>
+        <mc:Fallback>
+          <p:sp>
+            <p:nvSpPr>
+              <p:cNvPr id="8" name="TextBox 7">
+                <a:extLst>
+                  <a:ext uri="{FF2B5EF4-FFF2-40B4-BE49-F238E27FC236}">
+                    <a16:creationId xmlns:a16="http://schemas.microsoft.com/office/drawing/2014/main" id="{6DD6B8FE-8987-EF1C-D926-06058DA29067}"/>
+                  </a:ext>
+                </a:extLst>
+              </p:cNvPr>
+              <p:cNvSpPr txBox="1">
+                <a:spLocks noRot="1" noChangeAspect="1" noMove="1" noResize="1" noEditPoints="1" noAdjustHandles="1" noChangeArrowheads="1" noChangeShapeType="1" noTextEdit="1"/>
+              </p:cNvSpPr>
+              <p:nvPr/>
+            </p:nvSpPr>
+            <p:spPr>
+              <a:xfrm>
+                <a:off x="6000750" y="3214787"/>
+                <a:ext cx="4095750" cy="712759"/>
+              </a:xfrm>
+              <a:prstGeom prst="rect">
+                <a:avLst/>
+              </a:prstGeom>
+              <a:blipFill>
+                <a:blip r:embed="rId2"/>
+                <a:stretch>
+                  <a:fillRect l="-2232" b="-3419"/>
+                </a:stretch>
+              </a:blipFill>
+            </p:spPr>
+            <p:txBody>
+              <a:bodyPr/>
+              <a:lstStyle/>
               <a:p>
-                <a:pPr marL="0" indent="0" algn="just">
-                  <a:buNone/>
-                </a:pPr>
                 <a:r>
-                  <a:rPr lang="en-IN" sz="2200" b="1" dirty="0">
-                    <a:latin typeface="Times New Roman" panose="02020603050405020304" pitchFamily="18" charset="0"/>
-                    <a:cs typeface="Times New Roman" panose="02020603050405020304" pitchFamily="18" charset="0"/>
+                  <a:rPr lang="en-IN">
+                    <a:noFill/>
                   </a:rPr>
-                  <a:t>           Disease ( 5 healthy), Prediction (disease – 2, healthy – 3)</a:t>
+                  <a:t> </a:t>
                 </a:r>
               </a:p>
+            </p:txBody>
+          </p:sp>
+        </mc:Fallback>
+      </mc:AlternateContent>
+      <mc:AlternateContent xmlns:mc="http://schemas.openxmlformats.org/markup-compatibility/2006">
+        <mc:Choice xmlns:a14="http://schemas.microsoft.com/office/drawing/2010/main" Requires="a14">
+          <p:sp>
+            <p:nvSpPr>
+              <p:cNvPr id="10" name="TextBox 9">
+                <a:extLst>
+                  <a:ext uri="{FF2B5EF4-FFF2-40B4-BE49-F238E27FC236}">
+                    <a16:creationId xmlns:a16="http://schemas.microsoft.com/office/drawing/2014/main" id="{A11BE60A-31D8-F703-4A79-3B52B7256BE5}"/>
+                  </a:ext>
+                </a:extLst>
+              </p:cNvPr>
+              <p:cNvSpPr txBox="1"/>
+              <p:nvPr/>
+            </p:nvSpPr>
+            <p:spPr>
+              <a:xfrm>
+                <a:off x="6095999" y="4662647"/>
+                <a:ext cx="4371976" cy="712759"/>
+              </a:xfrm>
+              <a:prstGeom prst="rect">
+                <a:avLst/>
+              </a:prstGeom>
+              <a:noFill/>
+            </p:spPr>
+            <p:txBody>
+              <a:bodyPr wrap="square">
+                <a:spAutoFit/>
+              </a:bodyPr>
+              <a:lstStyle/>
               <a:p>
-                <a:pPr marL="0" indent="0" algn="just">
-                  <a:buNone/>
-                </a:pPr>
+                <a:pPr algn="just"/>
                 <a:r>
-                  <a:rPr lang="en-IN" sz="2200" b="1" dirty="0">
-                    <a:latin typeface="Times New Roman" panose="02020603050405020304" pitchFamily="18" charset="0"/>
-                    <a:cs typeface="Times New Roman" panose="02020603050405020304" pitchFamily="18" charset="0"/>
-                  </a:rPr>
-                  <a:t>               </a:t>
-                </a:r>
-                <a:r>
-                  <a:rPr lang="en-IN" sz="2000" dirty="0">
+                  <a:rPr lang="en-IN" sz="2400" dirty="0">
                     <a:latin typeface="Times New Roman" panose="02020603050405020304" pitchFamily="18" charset="0"/>
                     <a:cs typeface="Times New Roman" panose="02020603050405020304" pitchFamily="18" charset="0"/>
                   </a:rPr>
@@ -7727,7 +9900,7 @@
                     <m:f>
                       <m:fPr>
                         <m:ctrlPr>
-                          <a:rPr lang="en-IN" sz="2400" i="1">
+                          <a:rPr lang="en-IN" sz="2800" i="1">
                             <a:latin typeface="Cambria Math" panose="02040503050406030204" pitchFamily="18" charset="0"/>
                             <a:cs typeface="Times New Roman" panose="02020603050405020304" pitchFamily="18" charset="0"/>
                           </a:rPr>
@@ -7735,7 +9908,62 @@
                       </m:fPr>
                       <m:num>
                         <m:r>
-                          <a:rPr lang="en-IN" sz="2400" b="0" i="0" smtClean="0">
+                          <m:rPr>
+                            <m:sty m:val="p"/>
+                          </m:rPr>
+                          <a:rPr lang="en-IN" sz="2800" b="0" i="0" smtClean="0">
+                            <a:latin typeface="Cambria Math" panose="02040503050406030204" pitchFamily="18" charset="0"/>
+                            <a:cs typeface="Times New Roman" panose="02020603050405020304" pitchFamily="18" charset="0"/>
+                          </a:rPr>
+                          <m:t>FP</m:t>
+                        </m:r>
+                      </m:num>
+                      <m:den>
+                        <m:r>
+                          <m:rPr>
+                            <m:sty m:val="p"/>
+                          </m:rPr>
+                          <a:rPr lang="en-IN" sz="2800" b="0" i="0" smtClean="0">
+                            <a:latin typeface="Cambria Math" panose="02040503050406030204" pitchFamily="18" charset="0"/>
+                            <a:cs typeface="Times New Roman" panose="02020603050405020304" pitchFamily="18" charset="0"/>
+                          </a:rPr>
+                          <m:t>FP</m:t>
+                        </m:r>
+                        <m:r>
+                          <a:rPr lang="en-IN" sz="2800">
+                            <a:latin typeface="Cambria Math" panose="02040503050406030204" pitchFamily="18" charset="0"/>
+                            <a:cs typeface="Times New Roman" panose="02020603050405020304" pitchFamily="18" charset="0"/>
+                          </a:rPr>
+                          <m:t>+</m:t>
+                        </m:r>
+                        <m:r>
+                          <a:rPr lang="en-IN" sz="2800" b="0" i="1" smtClean="0">
+                            <a:latin typeface="Cambria Math" panose="02040503050406030204" pitchFamily="18" charset="0"/>
+                            <a:cs typeface="Times New Roman" panose="02020603050405020304" pitchFamily="18" charset="0"/>
+                          </a:rPr>
+                          <m:t>𝑇𝑁</m:t>
+                        </m:r>
+                      </m:den>
+                    </m:f>
+                    <m:r>
+                      <a:rPr lang="en-IN" sz="2800" b="0" i="1" smtClean="0">
+                        <a:latin typeface="Cambria Math" panose="02040503050406030204" pitchFamily="18" charset="0"/>
+                        <a:cs typeface="Times New Roman" panose="02020603050405020304" pitchFamily="18" charset="0"/>
+                      </a:rPr>
+                      <m:t>=</m:t>
+                    </m:r>
+                    <m:f>
+                      <m:fPr>
+                        <m:ctrlPr>
+                          <a:rPr lang="en-IN" sz="2800" i="1">
+                            <a:latin typeface="Cambria Math" panose="02040503050406030204" pitchFamily="18" charset="0"/>
+                            <a:cs typeface="Times New Roman" panose="02020603050405020304" pitchFamily="18" charset="0"/>
+                          </a:rPr>
+                        </m:ctrlPr>
+                      </m:fPr>
+                      <m:num>
+                        <m:r>
+                          <a:rPr lang="en-IN" sz="2800" b="0" i="1" smtClean="0">
                             <a:latin typeface="Cambria Math" panose="02040503050406030204" pitchFamily="18" charset="0"/>
                             <a:cs typeface="Times New Roman" panose="02020603050405020304" pitchFamily="18" charset="0"/>
                           </a:rPr>
@@ -7744,21 +9972,21 @@
                       </m:num>
                       <m:den>
                         <m:r>
-                          <a:rPr lang="en-IN" sz="2400" b="0" i="0" smtClean="0">
+                          <a:rPr lang="en-IN" sz="2800" b="0" i="0" smtClean="0">
                             <a:latin typeface="Cambria Math" panose="02040503050406030204" pitchFamily="18" charset="0"/>
                             <a:cs typeface="Times New Roman" panose="02020603050405020304" pitchFamily="18" charset="0"/>
                           </a:rPr>
                           <m:t>2</m:t>
                         </m:r>
                         <m:r>
-                          <a:rPr lang="en-IN" sz="2400">
+                          <a:rPr lang="en-IN" sz="2800">
                             <a:latin typeface="Cambria Math" panose="02040503050406030204" pitchFamily="18" charset="0"/>
                             <a:cs typeface="Times New Roman" panose="02020603050405020304" pitchFamily="18" charset="0"/>
                           </a:rPr>
                           <m:t>+</m:t>
                         </m:r>
                         <m:r>
-                          <a:rPr lang="en-IN" sz="2400" b="0" i="1" smtClean="0">
+                          <a:rPr lang="en-IN" sz="2800" b="0" i="1" smtClean="0">
                             <a:latin typeface="Cambria Math" panose="02040503050406030204" pitchFamily="18" charset="0"/>
                             <a:cs typeface="Times New Roman" panose="02020603050405020304" pitchFamily="18" charset="0"/>
                           </a:rPr>
@@ -7767,14 +9995,14 @@
                       </m:den>
                     </m:f>
                     <m:r>
-                      <a:rPr lang="en-IN" sz="2400">
+                      <a:rPr lang="en-IN" sz="2800">
                         <a:latin typeface="Cambria Math" panose="02040503050406030204" pitchFamily="18" charset="0"/>
                         <a:cs typeface="Times New Roman" panose="02020603050405020304" pitchFamily="18" charset="0"/>
                       </a:rPr>
                       <m:t>=0.</m:t>
                     </m:r>
                     <m:r>
-                      <a:rPr lang="en-IN" sz="2400" b="0" i="0" smtClean="0">
+                      <a:rPr lang="en-IN" sz="2800" b="0" i="0" smtClean="0">
                         <a:latin typeface="Cambria Math" panose="02040503050406030204" pitchFamily="18" charset="0"/>
                         <a:cs typeface="Times New Roman" panose="02020603050405020304" pitchFamily="18" charset="0"/>
                       </a:rPr>
@@ -7787,189 +10015,36 @@
                   <a:cs typeface="Times New Roman" panose="02020603050405020304" pitchFamily="18" charset="0"/>
                 </a:endParaRPr>
               </a:p>
-              <a:p>
-                <a:pPr marL="0" indent="0" algn="just">
-                  <a:buNone/>
-                </a:pPr>
-                <a:endParaRPr lang="en-IN" sz="2200" i="1" dirty="0">
-                  <a:latin typeface="Times New Roman" panose="02020603050405020304" pitchFamily="18" charset="0"/>
-                  <a:cs typeface="Times New Roman" panose="02020603050405020304" pitchFamily="18" charset="0"/>
-                </a:endParaRPr>
-              </a:p>
-              <a:p>
-                <a:pPr marL="0" indent="0" algn="just">
-                  <a:buNone/>
-                </a:pPr>
-                <a:r>
-                  <a:rPr lang="en-IN" sz="2200" i="1" dirty="0">
-                    <a:latin typeface="Times New Roman" panose="02020603050405020304" pitchFamily="18" charset="0"/>
-                    <a:cs typeface="Times New Roman" panose="02020603050405020304" pitchFamily="18" charset="0"/>
-                  </a:rPr>
-                  <a:t>Y-axis (True Positive Rate, TPR = Recall) = </a:t>
-                </a:r>
-                <a14:m>
-                  <m:oMath xmlns:m="http://schemas.openxmlformats.org/officeDocument/2006/math">
-                    <m:f>
-                      <m:fPr>
-                        <m:ctrlPr>
-                          <a:rPr lang="en-IN" i="1" smtClean="0">
-                            <a:latin typeface="Cambria Math" panose="02040503050406030204" pitchFamily="18" charset="0"/>
-                          </a:rPr>
-                        </m:ctrlPr>
-                      </m:fPr>
-                      <m:num>
-                        <m:r>
-                          <a:rPr lang="en-IN" b="0" i="1" smtClean="0">
-                            <a:latin typeface="Cambria Math" panose="02040503050406030204" pitchFamily="18" charset="0"/>
-                          </a:rPr>
-                          <m:t>𝑇𝑃</m:t>
-                        </m:r>
-                      </m:num>
-                      <m:den>
-                        <m:r>
-                          <a:rPr lang="en-IN" b="0" i="1" smtClean="0">
-                            <a:latin typeface="Cambria Math" panose="02040503050406030204" pitchFamily="18" charset="0"/>
-                          </a:rPr>
-                          <m:t>𝑇𝑃</m:t>
-                        </m:r>
-                        <m:r>
-                          <a:rPr lang="en-IN" b="0" i="1" smtClean="0">
-                            <a:latin typeface="Cambria Math" panose="02040503050406030204" pitchFamily="18" charset="0"/>
-                          </a:rPr>
-                          <m:t>+</m:t>
-                        </m:r>
-                        <m:r>
-                          <a:rPr lang="en-IN" b="0" i="1" smtClean="0">
-                            <a:latin typeface="Cambria Math" panose="02040503050406030204" pitchFamily="18" charset="0"/>
-                          </a:rPr>
-                          <m:t>𝐹𝑁</m:t>
-                        </m:r>
-                      </m:den>
-                    </m:f>
-                  </m:oMath>
-                </a14:m>
-                <a:endParaRPr lang="en-IN" sz="2200" i="1" dirty="0">
-                  <a:latin typeface="Times New Roman" panose="02020603050405020304" pitchFamily="18" charset="0"/>
-                  <a:cs typeface="Times New Roman" panose="02020603050405020304" pitchFamily="18" charset="0"/>
-                </a:endParaRPr>
-              </a:p>
-              <a:p>
-                <a:pPr marL="0" indent="0" algn="just">
-                  <a:buNone/>
-                </a:pPr>
-                <a:r>
-                  <a:rPr lang="en-IN" sz="2200" b="1" dirty="0">
-                    <a:latin typeface="Times New Roman" panose="02020603050405020304" pitchFamily="18" charset="0"/>
-                    <a:cs typeface="Times New Roman" panose="02020603050405020304" pitchFamily="18" charset="0"/>
-                  </a:rPr>
-                  <a:t>	Disease ( 5 people), Prediction (disease – 4, healthy – 1)</a:t>
-                </a:r>
-              </a:p>
-              <a:p>
-                <a:pPr marL="0" indent="0" algn="just">
-                  <a:buNone/>
-                </a:pPr>
-                <a:r>
-                  <a:rPr lang="en-IN" sz="2200" dirty="0">
-                    <a:latin typeface="Times New Roman" panose="02020603050405020304" pitchFamily="18" charset="0"/>
-                    <a:cs typeface="Times New Roman" panose="02020603050405020304" pitchFamily="18" charset="0"/>
-                  </a:rPr>
-                  <a:t>                   TPR = </a:t>
-                </a:r>
-                <a14:m>
-                  <m:oMath xmlns:m="http://schemas.openxmlformats.org/officeDocument/2006/math">
-                    <m:f>
-                      <m:fPr>
-                        <m:ctrlPr>
-                          <a:rPr lang="en-IN" sz="2400" i="1">
-                            <a:latin typeface="Cambria Math" panose="02040503050406030204" pitchFamily="18" charset="0"/>
-                            <a:cs typeface="Times New Roman" panose="02020603050405020304" pitchFamily="18" charset="0"/>
-                          </a:rPr>
-                        </m:ctrlPr>
-                      </m:fPr>
-                      <m:num>
-                        <m:r>
-                          <a:rPr lang="en-IN" sz="2400">
-                            <a:latin typeface="Cambria Math" panose="02040503050406030204" pitchFamily="18" charset="0"/>
-                            <a:cs typeface="Times New Roman" panose="02020603050405020304" pitchFamily="18" charset="0"/>
-                          </a:rPr>
-                          <m:t>4</m:t>
-                        </m:r>
-                      </m:num>
-                      <m:den>
-                        <m:r>
-                          <a:rPr lang="en-IN" sz="2400">
-                            <a:latin typeface="Cambria Math" panose="02040503050406030204" pitchFamily="18" charset="0"/>
-                            <a:cs typeface="Times New Roman" panose="02020603050405020304" pitchFamily="18" charset="0"/>
-                          </a:rPr>
-                          <m:t>4+1</m:t>
-                        </m:r>
-                      </m:den>
-                    </m:f>
-                    <m:r>
-                      <a:rPr lang="en-IN" sz="2400">
-                        <a:latin typeface="Cambria Math" panose="02040503050406030204" pitchFamily="18" charset="0"/>
-                        <a:cs typeface="Times New Roman" panose="02020603050405020304" pitchFamily="18" charset="0"/>
-                      </a:rPr>
-                      <m:t>=0.8</m:t>
-                    </m:r>
-                  </m:oMath>
-                </a14:m>
-                <a:endParaRPr lang="en-IN" sz="2200" dirty="0">
-                  <a:latin typeface="Times New Roman" panose="02020603050405020304" pitchFamily="18" charset="0"/>
-                  <a:cs typeface="Times New Roman" panose="02020603050405020304" pitchFamily="18" charset="0"/>
-                </a:endParaRPr>
-              </a:p>
-              <a:p>
-                <a:pPr marL="0" indent="0" algn="just">
-                  <a:buNone/>
-                </a:pPr>
-                <a:endParaRPr lang="en-IN" sz="2200" i="1" dirty="0">
-                  <a:latin typeface="Times New Roman" panose="02020603050405020304" pitchFamily="18" charset="0"/>
-                  <a:cs typeface="Times New Roman" panose="02020603050405020304" pitchFamily="18" charset="0"/>
-                </a:endParaRPr>
-              </a:p>
-              <a:p>
-                <a:pPr marL="0" indent="0" algn="just">
-                  <a:buNone/>
-                </a:pPr>
-                <a:r>
-                  <a:rPr lang="en-IN" sz="2200" i="1" dirty="0">
-                    <a:latin typeface="Times New Roman" panose="02020603050405020304" pitchFamily="18" charset="0"/>
-                    <a:cs typeface="Times New Roman" panose="02020603050405020304" pitchFamily="18" charset="0"/>
-                  </a:rPr>
-                  <a:t>            </a:t>
-                </a:r>
-              </a:p>
             </p:txBody>
           </p:sp>
         </mc:Choice>
-        <mc:Fallback xmlns="">
+        <mc:Fallback>
           <p:sp>
             <p:nvSpPr>
-              <p:cNvPr id="3" name="Content Placeholder 2">
+              <p:cNvPr id="10" name="TextBox 9">
                 <a:extLst>
                   <a:ext uri="{FF2B5EF4-FFF2-40B4-BE49-F238E27FC236}">
-                    <a16:creationId xmlns:a16="http://schemas.microsoft.com/office/drawing/2014/main" id="{EB622653-DDA4-0B42-C2FA-90EB6523B0CE}"/>
+                    <a16:creationId xmlns:a16="http://schemas.microsoft.com/office/drawing/2014/main" id="{A11BE60A-31D8-F703-4A79-3B52B7256BE5}"/>
                   </a:ext>
                 </a:extLst>
               </p:cNvPr>
-              <p:cNvSpPr>
-                <a:spLocks noGrp="1" noRot="1" noChangeAspect="1" noMove="1" noResize="1" noEditPoints="1" noAdjustHandles="1" noChangeArrowheads="1" noChangeShapeType="1" noTextEdit="1"/>
+              <p:cNvSpPr txBox="1">
+                <a:spLocks noRot="1" noChangeAspect="1" noMove="1" noResize="1" noEditPoints="1" noAdjustHandles="1" noChangeArrowheads="1" noChangeShapeType="1" noTextEdit="1"/>
               </p:cNvSpPr>
-              <p:nvPr>
-                <p:ph idx="1"/>
-              </p:nvPr>
+              <p:nvPr/>
             </p:nvSpPr>
             <p:spPr>
               <a:xfrm>
-                <a:off x="838200" y="1247776"/>
-                <a:ext cx="10515600" cy="5248274"/>
+                <a:off x="6095999" y="4662647"/>
+                <a:ext cx="4371976" cy="712759"/>
               </a:xfrm>
+              <a:prstGeom prst="rect">
+                <a:avLst/>
+              </a:prstGeom>
               <a:blipFill>
-                <a:blip r:embed="rId2"/>
+                <a:blip r:embed="rId3"/>
                 <a:stretch>
-                  <a:fillRect l="-928" t="-1626"/>
+                  <a:fillRect l="-2092" b="-3419"/>
                 </a:stretch>
               </a:blipFill>
             </p:spPr>
@@ -7991,7 +10066,7 @@
     </p:spTree>
     <p:extLst>
       <p:ext uri="{BB962C8B-B14F-4D97-AF65-F5344CB8AC3E}">
-        <p14:creationId xmlns:p14="http://schemas.microsoft.com/office/powerpoint/2010/main" val="1517268302"/>
+        <p14:creationId xmlns:p14="http://schemas.microsoft.com/office/powerpoint/2010/main" val="3283330745"/>
       </p:ext>
     </p:extLst>
   </p:cSld>
@@ -8692,7 +10767,7 @@
                 <a:latin typeface="Times New Roman" panose="02020603050405020304" pitchFamily="18" charset="0"/>
                 <a:cs typeface="Times New Roman" panose="02020603050405020304" pitchFamily="18" charset="0"/>
               </a:rPr>
-              <a:t>If threshold = 0.9 → very few false positives, but may miss sick patients (low recall).</a:t>
+              <a:t>If threshold = high → very few false positives, but may miss sick patients (low recall).</a:t>
             </a:r>
           </a:p>
           <a:p>
@@ -8705,7 +10780,7 @@
                 <a:latin typeface="Times New Roman" panose="02020603050405020304" pitchFamily="18" charset="0"/>
                 <a:cs typeface="Times New Roman" panose="02020603050405020304" pitchFamily="18" charset="0"/>
               </a:rPr>
-              <a:t>If threshold = 0.2 → catch almost all sick patients, but many false alarms.</a:t>
+              <a:t>If threshold = low → catch almost all sick patients, but many false alarms.</a:t>
             </a:r>
           </a:p>
           <a:p>
